--- a/presentation/api-patterns-graphql-quarkus/api-patterns-graphql-quarkus.pptx
+++ b/presentation/api-patterns-graphql-quarkus/api-patterns-graphql-quarkus.pptx
@@ -75,9 +75,10 @@
     <p:sldId id="323" r:id="rId69"/>
     <p:sldId id="324" r:id="rId70"/>
     <p:sldId id="325" r:id="rId71"/>
+    <p:sldId id="326" r:id="rId72"/>
   </p:sldIdLst>
   <p:notesMasterIdLst>
-    <p:notesMasterId r:id="rId72"/>
+    <p:notesMasterId r:id="rId73"/>
   </p:notesMasterIdLst>
   <p:sldSz cx="12192000" cy="6858000"/>
   <p:notesSz cx="6858000" cy="12192000"/>
@@ -6491,6 +6492,94 @@
             <a:fld id="{F7021451-1387-4CA6-816F-3879F97B5CBC}" type="slidenum">
               <a:rPr lang="en-US"/>
               <a:t>70</a:t>
+            </a:fld>
+            <a:endParaRPr lang="en-US"/>
+          </a:p>
+        </p:txBody>
+      </p:sp>
+    </p:spTree>
+    <p:extLst>
+      <p:ext uri="{BB962C8B-B14F-4D97-AF65-F5344CB8AC3E}">
+        <p14:creationId xmlns:p14="http://schemas.microsoft.com/office/powerpoint/2010/main" val="1024086991"/>
+      </p:ext>
+    </p:extLst>
+  </p:cSld>
+  <p:clrMapOvr>
+    <a:masterClrMapping/>
+  </p:clrMapOvr>
+</p:notes>
+</file>
+
+<file path=ppt/notesSlides/notesSlide71.xml><?xml version="1.0" encoding="utf-8"?>
+<p:notes xmlns:a="http://schemas.openxmlformats.org/drawingml/2006/main" xmlns:r="http://schemas.openxmlformats.org/officeDocument/2006/relationships" xmlns:p="http://schemas.openxmlformats.org/presentationml/2006/main">
+  <p:cSld>
+    <p:spTree>
+      <p:nvGrpSpPr>
+        <p:cNvPr id="1" name=""/>
+        <p:cNvGrpSpPr/>
+        <p:nvPr/>
+      </p:nvGrpSpPr>
+      <p:grpSpPr>
+        <a:xfrm>
+          <a:off x="0" y="0"/>
+          <a:ext cx="0" cy="0"/>
+          <a:chOff x="0" y="0"/>
+          <a:chExt cx="0" cy="0"/>
+        </a:xfrm>
+      </p:grpSpPr>
+      <p:sp>
+        <p:nvSpPr>
+          <p:cNvPr id="2" name="Slide Image Placeholder 1"/>
+          <p:cNvSpPr>
+            <a:spLocks noGrp="1" noRot="1" noChangeAspect="1"/>
+          </p:cNvSpPr>
+          <p:nvPr>
+            <p:ph type="sldImg"/>
+          </p:nvPr>
+        </p:nvSpPr>
+        <p:spPr/>
+      </p:sp>
+      <p:sp>
+        <p:nvSpPr>
+          <p:cNvPr id="3" name="Notes Placeholder 2"/>
+          <p:cNvSpPr>
+            <a:spLocks noGrp="1"/>
+          </p:cNvSpPr>
+          <p:nvPr>
+            <p:ph type="body" idx="1"/>
+          </p:nvPr>
+        </p:nvSpPr>
+        <p:spPr/>
+        <p:txBody>
+          <a:bodyPr/>
+          <a:lstStyle/>
+          <a:p>
+            <a:r>
+              <a:rPr lang="en-US" dirty="0"/>
+              <a:t>This is the Quarkus/SmallRye GraphQL implementation deck, so the left code takes you to the runnable Quarkus example and schema, the right to the whole series. On the left, the site: the chapters, the GraphQL schema and contracts, and the runnable both-stack examples, all public. On the right, the Workshops and Tutorials hub: every workshop, tutorial, and deck in the series in one place, including the REST, gRPC, and WebSockets siblings. Scan whichever is useful; both are on the Pattern Catalyst GitHub organization.</a:t>
+            </a:r>
+            <a:endParaRPr lang="en-US" dirty="0"/>
+          </a:p>
+        </p:txBody>
+      </p:sp>
+      <p:sp>
+        <p:nvSpPr>
+          <p:cNvPr id="4" name="Slide Number Placeholder 3"/>
+          <p:cNvSpPr>
+            <a:spLocks noGrp="1"/>
+          </p:cNvSpPr>
+          <p:nvPr>
+            <p:ph type="sldNum" sz="quarter" idx="10"/>
+          </p:nvPr>
+        </p:nvSpPr>
+        <p:spPr/>
+        <p:txBody>
+          <a:bodyPr/>
+          <a:lstStyle/>
+          <a:p>
+            <a:fld id="{F7021451-1387-4CA6-816F-3879F97B5CBC}" type="slidenum">
+              <a:rPr lang="en-US"/>
+              <a:t>71</a:t>
             </a:fld>
             <a:endParaRPr lang="en-US"/>
           </a:p>
@@ -7058,7 +7147,7 @@
       </p:grpSpPr>
       <p:pic>
         <p:nvPicPr>
-          <p:cNvPr id="2" name="Image 0" descr="/work/_shared/assets/cover-panel.png">    </p:cNvPr>
+          <p:cNvPr id="2" name="Image 0" descr="/tmp/pcwork/api-patterns-and-practices-graphql/presentation/_shared/assets/cover-panel.png">    </p:cNvPr>
           <p:cNvPicPr>
             <a:picLocks noChangeAspect="1"/>
           </p:cNvPicPr>
@@ -7272,7 +7361,7 @@
       </p:sp>
       <p:pic>
         <p:nvPicPr>
-          <p:cNvPr id="7" name="Image 1" descr="/work/_shared/assets/logo-candidate-2.png">    </p:cNvPr>
+          <p:cNvPr id="7" name="Image 1" descr="/tmp/pcwork/api-patterns-and-practices-graphql/presentation/_shared/assets/logo-candidate-2.png">    </p:cNvPr>
           <p:cNvPicPr>
             <a:picLocks noChangeAspect="1"/>
           </p:cNvPicPr>
@@ -7360,7 +7449,7 @@
       </p:sp>
       <p:pic>
         <p:nvPicPr>
-          <p:cNvPr id="3" name="Image 0" descr="/work/_shared/assets/logo-candidate-2.png">    </p:cNvPr>
+          <p:cNvPr id="3" name="Image 0" descr="/tmp/pcwork/api-patterns-and-practices-graphql/presentation/_shared/assets/logo-candidate-2.png">    </p:cNvPr>
           <p:cNvPicPr>
             <a:picLocks noChangeAspect="1"/>
           </p:cNvPicPr>
@@ -7888,7 +7977,7 @@
       </p:sp>
       <p:pic>
         <p:nvPicPr>
-          <p:cNvPr id="3" name="Image 0" descr="/work/_shared/assets/logo-candidate-2.png">    </p:cNvPr>
+          <p:cNvPr id="3" name="Image 0" descr="/tmp/pcwork/api-patterns-and-practices-graphql/presentation/_shared/assets/logo-candidate-2.png">    </p:cNvPr>
           <p:cNvPicPr>
             <a:picLocks noChangeAspect="1"/>
           </p:cNvPicPr>
@@ -7990,7 +8079,7 @@
       </p:sp>
       <p:pic>
         <p:nvPicPr>
-          <p:cNvPr id="6" name="Image 1" descr="/work/_shared/png/05-two-direction-diff.png">    </p:cNvPr>
+          <p:cNvPr id="6" name="Image 1" descr="/tmp/pcwork/api-patterns-and-practices-graphql/presentation/_shared/png/05-two-direction-diff.png">    </p:cNvPr>
           <p:cNvPicPr>
             <a:picLocks noChangeAspect="1"/>
           </p:cNvPicPr>
@@ -8116,7 +8205,7 @@
       </p:sp>
       <p:pic>
         <p:nvPicPr>
-          <p:cNvPr id="3" name="Image 0" descr="/work/_shared/assets/logo-candidate-2.png">    </p:cNvPr>
+          <p:cNvPr id="3" name="Image 0" descr="/tmp/pcwork/api-patterns-and-practices-graphql/presentation/_shared/assets/logo-candidate-2.png">    </p:cNvPr>
           <p:cNvPicPr>
             <a:picLocks noChangeAspect="1"/>
           </p:cNvPicPr>
@@ -8650,7 +8739,7 @@
       </p:sp>
       <p:pic>
         <p:nvPicPr>
-          <p:cNvPr id="5" name="Image 0" descr="/work/_shared/assets/redhat-logo-white.png">    </p:cNvPr>
+          <p:cNvPr id="5" name="Image 0" descr="/tmp/pcwork/api-patterns-and-practices-graphql/presentation/_shared/assets/redhat-logo-white.png">    </p:cNvPr>
           <p:cNvPicPr>
             <a:picLocks noChangeAspect="1"/>
           </p:cNvPicPr>
@@ -8738,7 +8827,7 @@
       </p:sp>
       <p:pic>
         <p:nvPicPr>
-          <p:cNvPr id="3" name="Image 0" descr="/work/_shared/assets/logo-candidate-2.png">    </p:cNvPr>
+          <p:cNvPr id="3" name="Image 0" descr="/tmp/pcwork/api-patterns-and-practices-graphql/presentation/_shared/assets/logo-candidate-2.png">    </p:cNvPr>
           <p:cNvPicPr>
             <a:picLocks noChangeAspect="1"/>
           </p:cNvPicPr>
@@ -8840,7 +8929,7 @@
       </p:sp>
       <p:pic>
         <p:nvPicPr>
-          <p:cNvPr id="6" name="Image 1" descr="/work/_shared/png/06-parallel-siblings.png">    </p:cNvPr>
+          <p:cNvPr id="6" name="Image 1" descr="/tmp/pcwork/api-patterns-and-practices-graphql/presentation/_shared/png/06-parallel-siblings.png">    </p:cNvPr>
           <p:cNvPicPr>
             <a:picLocks noChangeAspect="1"/>
           </p:cNvPicPr>
@@ -8966,7 +9055,7 @@
       </p:sp>
       <p:pic>
         <p:nvPicPr>
-          <p:cNvPr id="3" name="Image 0" descr="/work/_shared/assets/logo-candidate-2.png">    </p:cNvPr>
+          <p:cNvPr id="3" name="Image 0" descr="/tmp/pcwork/api-patterns-and-practices-graphql/presentation/_shared/assets/logo-candidate-2.png">    </p:cNvPr>
           <p:cNvPicPr>
             <a:picLocks noChangeAspect="1"/>
           </p:cNvPicPr>
@@ -9566,7 +9655,7 @@
       </p:sp>
       <p:pic>
         <p:nvPicPr>
-          <p:cNvPr id="3" name="Image 0" descr="/work/_shared/assets/logo-candidate-2.png">    </p:cNvPr>
+          <p:cNvPr id="3" name="Image 0" descr="/tmp/pcwork/api-patterns-and-practices-graphql/presentation/_shared/assets/logo-candidate-2.png">    </p:cNvPr>
           <p:cNvPicPr>
             <a:picLocks noChangeAspect="1"/>
           </p:cNvPicPr>
@@ -10256,7 +10345,7 @@
       </p:sp>
       <p:pic>
         <p:nvPicPr>
-          <p:cNvPr id="3" name="Image 0" descr="/work/_shared/assets/logo-candidate-2.png">    </p:cNvPr>
+          <p:cNvPr id="3" name="Image 0" descr="/tmp/pcwork/api-patterns-and-practices-graphql/presentation/_shared/assets/logo-candidate-2.png">    </p:cNvPr>
           <p:cNvPicPr>
             <a:picLocks noChangeAspect="1"/>
           </p:cNvPicPr>
@@ -10934,7 +11023,7 @@
       </p:sp>
       <p:pic>
         <p:nvPicPr>
-          <p:cNvPr id="5" name="Image 0" descr="/work/_shared/assets/redhat-logo-white.png">    </p:cNvPr>
+          <p:cNvPr id="5" name="Image 0" descr="/tmp/pcwork/api-patterns-and-practices-graphql/presentation/_shared/assets/redhat-logo-white.png">    </p:cNvPr>
           <p:cNvPicPr>
             <a:picLocks noChangeAspect="1"/>
           </p:cNvPicPr>
@@ -11022,7 +11111,7 @@
       </p:sp>
       <p:pic>
         <p:nvPicPr>
-          <p:cNvPr id="3" name="Image 0" descr="/work/_shared/assets/logo-candidate-2.png">    </p:cNvPr>
+          <p:cNvPr id="3" name="Image 0" descr="/tmp/pcwork/api-patterns-and-practices-graphql/presentation/_shared/assets/logo-candidate-2.png">    </p:cNvPr>
           <p:cNvPicPr>
             <a:picLocks noChangeAspect="1"/>
           </p:cNvPicPr>
@@ -11532,7 +11621,7 @@
       </p:sp>
       <p:pic>
         <p:nvPicPr>
-          <p:cNvPr id="3" name="Image 0" descr="/work/_shared/assets/logo-candidate-2.png">    </p:cNvPr>
+          <p:cNvPr id="3" name="Image 0" descr="/tmp/pcwork/api-patterns-and-practices-graphql/presentation/_shared/assets/logo-candidate-2.png">    </p:cNvPr>
           <p:cNvPicPr>
             <a:picLocks noChangeAspect="1"/>
           </p:cNvPicPr>
@@ -12030,7 +12119,7 @@
       </p:sp>
       <p:pic>
         <p:nvPicPr>
-          <p:cNvPr id="3" name="Image 0" descr="/work/_shared/assets/logo-candidate-2.png">    </p:cNvPr>
+          <p:cNvPr id="3" name="Image 0" descr="/tmp/pcwork/api-patterns-and-practices-graphql/presentation/_shared/assets/logo-candidate-2.png">    </p:cNvPr>
           <p:cNvPicPr>
             <a:picLocks noChangeAspect="1"/>
           </p:cNvPicPr>
@@ -12666,7 +12755,7 @@
       </p:sp>
       <p:pic>
         <p:nvPicPr>
-          <p:cNvPr id="3" name="Image 0" descr="/work/_shared/assets/logo-candidate-2.png">    </p:cNvPr>
+          <p:cNvPr id="3" name="Image 0" descr="/tmp/pcwork/api-patterns-and-practices-graphql/presentation/_shared/assets/logo-candidate-2.png">    </p:cNvPr>
           <p:cNvPicPr>
             <a:picLocks noChangeAspect="1"/>
           </p:cNvPicPr>
@@ -13248,7 +13337,7 @@
       </p:sp>
       <p:pic>
         <p:nvPicPr>
-          <p:cNvPr id="3" name="Image 0" descr="/work/_shared/assets/logo-candidate-2.png">    </p:cNvPr>
+          <p:cNvPr id="3" name="Image 0" descr="/tmp/pcwork/api-patterns-and-practices-graphql/presentation/_shared/assets/logo-candidate-2.png">    </p:cNvPr>
           <p:cNvPicPr>
             <a:picLocks noChangeAspect="1"/>
           </p:cNvPicPr>
@@ -13350,7 +13439,7 @@
       </p:sp>
       <p:pic>
         <p:nvPicPr>
-          <p:cNvPr id="6" name="Image 1" descr="/work/_shared/png/09-error-masking.png">    </p:cNvPr>
+          <p:cNvPr id="6" name="Image 1" descr="/tmp/pcwork/api-patterns-and-practices-graphql/presentation/_shared/png/09-error-masking.png">    </p:cNvPr>
           <p:cNvPicPr>
             <a:picLocks noChangeAspect="1"/>
           </p:cNvPicPr>
@@ -13476,7 +13565,7 @@
       </p:sp>
       <p:pic>
         <p:nvPicPr>
-          <p:cNvPr id="3" name="Image 0" descr="/work/_shared/assets/logo-candidate-2.png">    </p:cNvPr>
+          <p:cNvPr id="3" name="Image 0" descr="/tmp/pcwork/api-patterns-and-practices-graphql/presentation/_shared/assets/logo-candidate-2.png">    </p:cNvPr>
           <p:cNvPicPr>
             <a:picLocks noChangeAspect="1"/>
           </p:cNvPicPr>
@@ -14118,7 +14207,7 @@
       </p:sp>
       <p:pic>
         <p:nvPicPr>
-          <p:cNvPr id="5" name="Image 0" descr="/work/_shared/assets/redhat-logo-white.png">    </p:cNvPr>
+          <p:cNvPr id="5" name="Image 0" descr="/tmp/pcwork/api-patterns-and-practices-graphql/presentation/_shared/assets/redhat-logo-white.png">    </p:cNvPr>
           <p:cNvPicPr>
             <a:picLocks noChangeAspect="1"/>
           </p:cNvPicPr>
@@ -14206,7 +14295,7 @@
       </p:sp>
       <p:pic>
         <p:nvPicPr>
-          <p:cNvPr id="3" name="Image 0" descr="/work/_shared/assets/logo-candidate-2.png">    </p:cNvPr>
+          <p:cNvPr id="3" name="Image 0" descr="/tmp/pcwork/api-patterns-and-practices-graphql/presentation/_shared/assets/logo-candidate-2.png">    </p:cNvPr>
           <p:cNvPicPr>
             <a:picLocks noChangeAspect="1"/>
           </p:cNvPicPr>
@@ -14806,7 +14895,7 @@
       </p:sp>
       <p:pic>
         <p:nvPicPr>
-          <p:cNvPr id="3" name="Image 0" descr="/work/_shared/assets/logo-candidate-2.png">    </p:cNvPr>
+          <p:cNvPr id="3" name="Image 0" descr="/tmp/pcwork/api-patterns-and-practices-graphql/presentation/_shared/assets/logo-candidate-2.png">    </p:cNvPr>
           <p:cNvPicPr>
             <a:picLocks noChangeAspect="1"/>
           </p:cNvPicPr>
@@ -15424,7 +15513,7 @@
       </p:sp>
       <p:pic>
         <p:nvPicPr>
-          <p:cNvPr id="3" name="Image 0" descr="/work/_shared/assets/logo-candidate-2.png">    </p:cNvPr>
+          <p:cNvPr id="3" name="Image 0" descr="/tmp/pcwork/api-patterns-and-practices-graphql/presentation/_shared/assets/logo-candidate-2.png">    </p:cNvPr>
           <p:cNvPicPr>
             <a:picLocks noChangeAspect="1"/>
           </p:cNvPicPr>
@@ -15916,7 +16005,7 @@
       </p:sp>
       <p:pic>
         <p:nvPicPr>
-          <p:cNvPr id="3" name="Image 0" descr="/work/_shared/assets/logo-candidate-2.png">    </p:cNvPr>
+          <p:cNvPr id="3" name="Image 0" descr="/tmp/pcwork/api-patterns-and-practices-graphql/presentation/_shared/assets/logo-candidate-2.png">    </p:cNvPr>
           <p:cNvPicPr>
             <a:picLocks noChangeAspect="1"/>
           </p:cNvPicPr>
@@ -16018,7 +16107,7 @@
       </p:sp>
       <p:pic>
         <p:nvPicPr>
-          <p:cNvPr id="6" name="Image 1" descr="/work/_shared/png/11-deprecation-lifecycle.png">    </p:cNvPr>
+          <p:cNvPr id="6" name="Image 1" descr="/tmp/pcwork/api-patterns-and-practices-graphql/presentation/_shared/png/11-deprecation-lifecycle.png">    </p:cNvPr>
           <p:cNvPicPr>
             <a:picLocks noChangeAspect="1"/>
           </p:cNvPicPr>
@@ -16222,7 +16311,7 @@
       </p:sp>
       <p:pic>
         <p:nvPicPr>
-          <p:cNvPr id="5" name="Image 0" descr="/work/_shared/assets/redhat-logo-white.png">    </p:cNvPr>
+          <p:cNvPr id="5" name="Image 0" descr="/tmp/pcwork/api-patterns-and-practices-graphql/presentation/_shared/assets/redhat-logo-white.png">    </p:cNvPr>
           <p:cNvPicPr>
             <a:picLocks noChangeAspect="1"/>
           </p:cNvPicPr>
@@ -16310,7 +16399,7 @@
       </p:sp>
       <p:pic>
         <p:nvPicPr>
-          <p:cNvPr id="3" name="Image 0" descr="/work/_shared/assets/logo-candidate-2.png">    </p:cNvPr>
+          <p:cNvPr id="3" name="Image 0" descr="/tmp/pcwork/api-patterns-and-practices-graphql/presentation/_shared/assets/logo-candidate-2.png">    </p:cNvPr>
           <p:cNvPicPr>
             <a:picLocks noChangeAspect="1"/>
           </p:cNvPicPr>
@@ -16657,7 +16746,7 @@
       </p:sp>
       <p:pic>
         <p:nvPicPr>
-          <p:cNvPr id="3" name="Image 0" descr="/work/_shared/assets/logo-candidate-2.png">    </p:cNvPr>
+          <p:cNvPr id="3" name="Image 0" descr="/tmp/pcwork/api-patterns-and-practices-graphql/presentation/_shared/assets/logo-candidate-2.png">    </p:cNvPr>
           <p:cNvPicPr>
             <a:picLocks noChangeAspect="1"/>
           </p:cNvPicPr>
@@ -17149,7 +17238,7 @@
       </p:sp>
       <p:pic>
         <p:nvPicPr>
-          <p:cNvPr id="3" name="Image 0" descr="/work/_shared/assets/logo-candidate-2.png">    </p:cNvPr>
+          <p:cNvPr id="3" name="Image 0" descr="/tmp/pcwork/api-patterns-and-practices-graphql/presentation/_shared/assets/logo-candidate-2.png">    </p:cNvPr>
           <p:cNvPicPr>
             <a:picLocks noChangeAspect="1"/>
           </p:cNvPicPr>
@@ -17695,7 +17784,7 @@
       </p:sp>
       <p:pic>
         <p:nvPicPr>
-          <p:cNvPr id="3" name="Image 0" descr="/work/_shared/assets/logo-candidate-2.png">    </p:cNvPr>
+          <p:cNvPr id="3" name="Image 0" descr="/tmp/pcwork/api-patterns-and-practices-graphql/presentation/_shared/assets/logo-candidate-2.png">    </p:cNvPr>
           <p:cNvPicPr>
             <a:picLocks noChangeAspect="1"/>
           </p:cNvPicPr>
@@ -17797,7 +17886,7 @@
       </p:sp>
       <p:pic>
         <p:nvPicPr>
-          <p:cNvPr id="6" name="Image 1" descr="/work/_shared/png/13-per-field-vs-per-key.png">    </p:cNvPr>
+          <p:cNvPr id="6" name="Image 1" descr="/tmp/pcwork/api-patterns-and-practices-graphql/presentation/_shared/png/13-per-field-vs-per-key.png">    </p:cNvPr>
           <p:cNvPicPr>
             <a:picLocks noChangeAspect="1"/>
           </p:cNvPicPr>
@@ -17923,7 +18012,7 @@
       </p:sp>
       <p:pic>
         <p:nvPicPr>
-          <p:cNvPr id="3" name="Image 0" descr="/work/_shared/assets/logo-candidate-2.png">    </p:cNvPr>
+          <p:cNvPr id="3" name="Image 0" descr="/tmp/pcwork/api-patterns-and-practices-graphql/presentation/_shared/assets/logo-candidate-2.png">    </p:cNvPr>
           <p:cNvPicPr>
             <a:picLocks noChangeAspect="1"/>
           </p:cNvPicPr>
@@ -18493,7 +18582,7 @@
       </p:sp>
       <p:pic>
         <p:nvPicPr>
-          <p:cNvPr id="5" name="Image 0" descr="/work/_shared/assets/redhat-logo-white.png">    </p:cNvPr>
+          <p:cNvPr id="5" name="Image 0" descr="/tmp/pcwork/api-patterns-and-practices-graphql/presentation/_shared/assets/redhat-logo-white.png">    </p:cNvPr>
           <p:cNvPicPr>
             <a:picLocks noChangeAspect="1"/>
           </p:cNvPicPr>
@@ -18581,7 +18670,7 @@
       </p:sp>
       <p:pic>
         <p:nvPicPr>
-          <p:cNvPr id="3" name="Image 0" descr="/work/_shared/assets/logo-candidate-2.png">    </p:cNvPr>
+          <p:cNvPr id="3" name="Image 0" descr="/tmp/pcwork/api-patterns-and-practices-graphql/presentation/_shared/assets/logo-candidate-2.png">    </p:cNvPr>
           <p:cNvPicPr>
             <a:picLocks noChangeAspect="1"/>
           </p:cNvPicPr>
@@ -18683,7 +18772,7 @@
       </p:sp>
       <p:pic>
         <p:nvPicPr>
-          <p:cNvPr id="6" name="Image 1" descr="/work/_shared/png/14-limit-pipeline.png">    </p:cNvPr>
+          <p:cNvPr id="6" name="Image 1" descr="/tmp/pcwork/api-patterns-and-practices-graphql/presentation/_shared/png/14-limit-pipeline.png">    </p:cNvPr>
           <p:cNvPicPr>
             <a:picLocks noChangeAspect="1"/>
           </p:cNvPicPr>
@@ -18809,7 +18898,7 @@
       </p:sp>
       <p:pic>
         <p:nvPicPr>
-          <p:cNvPr id="3" name="Image 0" descr="/work/_shared/assets/logo-candidate-2.png">    </p:cNvPr>
+          <p:cNvPr id="3" name="Image 0" descr="/tmp/pcwork/api-patterns-and-practices-graphql/presentation/_shared/assets/logo-candidate-2.png">    </p:cNvPr>
           <p:cNvPicPr>
             <a:picLocks noChangeAspect="1"/>
           </p:cNvPicPr>
@@ -19463,7 +19552,7 @@
       </p:sp>
       <p:pic>
         <p:nvPicPr>
-          <p:cNvPr id="3" name="Image 0" descr="/work/_shared/assets/logo-candidate-2.png">    </p:cNvPr>
+          <p:cNvPr id="3" name="Image 0" descr="/tmp/pcwork/api-patterns-and-practices-graphql/presentation/_shared/assets/logo-candidate-2.png">    </p:cNvPr>
           <p:cNvPicPr>
             <a:picLocks noChangeAspect="1"/>
           </p:cNvPicPr>
@@ -19565,7 +19654,7 @@
       </p:sp>
       <p:pic>
         <p:nvPicPr>
-          <p:cNvPr id="6" name="Image 1" descr="/work/_shared/png/15-persisted-document-seam.png">    </p:cNvPr>
+          <p:cNvPr id="6" name="Image 1" descr="/tmp/pcwork/api-patterns-and-practices-graphql/presentation/_shared/png/15-persisted-document-seam.png">    </p:cNvPr>
           <p:cNvPicPr>
             <a:picLocks noChangeAspect="1"/>
           </p:cNvPicPr>
@@ -19691,7 +19780,7 @@
       </p:sp>
       <p:pic>
         <p:nvPicPr>
-          <p:cNvPr id="3" name="Image 0" descr="/work/_shared/assets/logo-candidate-2.png">    </p:cNvPr>
+          <p:cNvPr id="3" name="Image 0" descr="/tmp/pcwork/api-patterns-and-practices-graphql/presentation/_shared/assets/logo-candidate-2.png">    </p:cNvPr>
           <p:cNvPicPr>
             <a:picLocks noChangeAspect="1"/>
           </p:cNvPicPr>
@@ -20417,7 +20506,7 @@
       </p:sp>
       <p:pic>
         <p:nvPicPr>
-          <p:cNvPr id="3" name="Image 0" descr="/work/_shared/assets/logo-candidate-2.png">    </p:cNvPr>
+          <p:cNvPr id="3" name="Image 0" descr="/tmp/pcwork/api-patterns-and-practices-graphql/presentation/_shared/assets/logo-candidate-2.png">    </p:cNvPr>
           <p:cNvPicPr>
             <a:picLocks noChangeAspect="1"/>
           </p:cNvPicPr>
@@ -21077,7 +21166,7 @@
       </p:sp>
       <p:pic>
         <p:nvPicPr>
-          <p:cNvPr id="5" name="Image 0" descr="/work/_shared/assets/redhat-logo-white.png">    </p:cNvPr>
+          <p:cNvPr id="5" name="Image 0" descr="/tmp/pcwork/api-patterns-and-practices-graphql/presentation/_shared/assets/redhat-logo-white.png">    </p:cNvPr>
           <p:cNvPicPr>
             <a:picLocks noChangeAspect="1"/>
           </p:cNvPicPr>
@@ -21243,7 +21332,7 @@
       </p:sp>
       <p:pic>
         <p:nvPicPr>
-          <p:cNvPr id="5" name="Image 0" descr="/work/_shared/assets/redhat-logo-white.png">    </p:cNvPr>
+          <p:cNvPr id="5" name="Image 0" descr="/tmp/pcwork/api-patterns-and-practices-graphql/presentation/_shared/assets/redhat-logo-white.png">    </p:cNvPr>
           <p:cNvPicPr>
             <a:picLocks noChangeAspect="1"/>
           </p:cNvPicPr>
@@ -21331,7 +21420,7 @@
       </p:sp>
       <p:pic>
         <p:nvPicPr>
-          <p:cNvPr id="3" name="Image 0" descr="/work/_shared/assets/logo-candidate-2.png">    </p:cNvPr>
+          <p:cNvPr id="3" name="Image 0" descr="/tmp/pcwork/api-patterns-and-practices-graphql/presentation/_shared/assets/logo-candidate-2.png">    </p:cNvPr>
           <p:cNvPicPr>
             <a:picLocks noChangeAspect="1"/>
           </p:cNvPicPr>
@@ -21859,7 +21948,7 @@
       </p:sp>
       <p:pic>
         <p:nvPicPr>
-          <p:cNvPr id="3" name="Image 0" descr="/work/_shared/assets/logo-candidate-2.png">    </p:cNvPr>
+          <p:cNvPr id="3" name="Image 0" descr="/tmp/pcwork/api-patterns-and-practices-graphql/presentation/_shared/assets/logo-candidate-2.png">    </p:cNvPr>
           <p:cNvPicPr>
             <a:picLocks noChangeAspect="1"/>
           </p:cNvPicPr>
@@ -22549,7 +22638,7 @@
       </p:sp>
       <p:pic>
         <p:nvPicPr>
-          <p:cNvPr id="3" name="Image 0" descr="/work/_shared/assets/logo-candidate-2.png">    </p:cNvPr>
+          <p:cNvPr id="3" name="Image 0" descr="/tmp/pcwork/api-patterns-and-practices-graphql/presentation/_shared/assets/logo-candidate-2.png">    </p:cNvPr>
           <p:cNvPicPr>
             <a:picLocks noChangeAspect="1"/>
           </p:cNvPicPr>
@@ -22987,7 +23076,7 @@
       </p:sp>
       <p:pic>
         <p:nvPicPr>
-          <p:cNvPr id="3" name="Image 0" descr="/work/_shared/assets/logo-candidate-2.png">    </p:cNvPr>
+          <p:cNvPr id="3" name="Image 0" descr="/tmp/pcwork/api-patterns-and-practices-graphql/presentation/_shared/assets/logo-candidate-2.png">    </p:cNvPr>
           <p:cNvPicPr>
             <a:picLocks noChangeAspect="1"/>
           </p:cNvPicPr>
@@ -23587,7 +23676,7 @@
       </p:sp>
       <p:pic>
         <p:nvPicPr>
-          <p:cNvPr id="3" name="Image 0" descr="/work/_shared/assets/logo-candidate-2.png">    </p:cNvPr>
+          <p:cNvPr id="3" name="Image 0" descr="/tmp/pcwork/api-patterns-and-practices-graphql/presentation/_shared/assets/logo-candidate-2.png">    </p:cNvPr>
           <p:cNvPicPr>
             <a:picLocks noChangeAspect="1"/>
           </p:cNvPicPr>
@@ -24409,7 +24498,7 @@
       </p:sp>
       <p:pic>
         <p:nvPicPr>
-          <p:cNvPr id="5" name="Image 0" descr="/work/_shared/assets/redhat-logo-white.png">    </p:cNvPr>
+          <p:cNvPr id="5" name="Image 0" descr="/tmp/pcwork/api-patterns-and-practices-graphql/presentation/_shared/assets/redhat-logo-white.png">    </p:cNvPr>
           <p:cNvPicPr>
             <a:picLocks noChangeAspect="1"/>
           </p:cNvPicPr>
@@ -24497,7 +24586,7 @@
       </p:sp>
       <p:pic>
         <p:nvPicPr>
-          <p:cNvPr id="3" name="Image 0" descr="/work/_shared/assets/logo-candidate-2.png">    </p:cNvPr>
+          <p:cNvPr id="3" name="Image 0" descr="/tmp/pcwork/api-patterns-and-practices-graphql/presentation/_shared/assets/logo-candidate-2.png">    </p:cNvPr>
           <p:cNvPicPr>
             <a:picLocks noChangeAspect="1"/>
           </p:cNvPicPr>
@@ -24599,7 +24688,7 @@
       </p:sp>
       <p:pic>
         <p:nvPicPr>
-          <p:cNvPr id="6" name="Image 1" descr="/work/_shared/png/19-telemetry-pipeline.png">    </p:cNvPr>
+          <p:cNvPr id="6" name="Image 1" descr="/tmp/pcwork/api-patterns-and-practices-graphql/presentation/_shared/png/19-telemetry-pipeline.png">    </p:cNvPr>
           <p:cNvPicPr>
             <a:picLocks noChangeAspect="1"/>
           </p:cNvPicPr>
@@ -24725,7 +24814,7 @@
       </p:sp>
       <p:pic>
         <p:nvPicPr>
-          <p:cNvPr id="3" name="Image 0" descr="/work/_shared/assets/logo-candidate-2.png">    </p:cNvPr>
+          <p:cNvPr id="3" name="Image 0" descr="/tmp/pcwork/api-patterns-and-practices-graphql/presentation/_shared/assets/logo-candidate-2.png">    </p:cNvPr>
           <p:cNvPicPr>
             <a:picLocks noChangeAspect="1"/>
           </p:cNvPicPr>
@@ -25307,7 +25396,7 @@
       </p:sp>
       <p:pic>
         <p:nvPicPr>
-          <p:cNvPr id="3" name="Image 0" descr="/work/_shared/assets/logo-candidate-2.png">    </p:cNvPr>
+          <p:cNvPr id="3" name="Image 0" descr="/tmp/pcwork/api-patterns-and-practices-graphql/presentation/_shared/assets/logo-candidate-2.png">    </p:cNvPr>
           <p:cNvPicPr>
             <a:picLocks noChangeAspect="1"/>
           </p:cNvPicPr>
@@ -26033,7 +26122,7 @@
       </p:sp>
       <p:pic>
         <p:nvPicPr>
-          <p:cNvPr id="3" name="Image 0" descr="/work/_shared/assets/logo-candidate-2.png">    </p:cNvPr>
+          <p:cNvPr id="3" name="Image 0" descr="/tmp/pcwork/api-patterns-and-practices-graphql/presentation/_shared/assets/logo-candidate-2.png">    </p:cNvPr>
           <p:cNvPicPr>
             <a:picLocks noChangeAspect="1"/>
           </p:cNvPicPr>
@@ -26135,7 +26224,7 @@
       </p:sp>
       <p:pic>
         <p:nvPicPr>
-          <p:cNvPr id="6" name="Image 1" descr="/work/_shared/png/00-lab-topology.png">    </p:cNvPr>
+          <p:cNvPr id="6" name="Image 1" descr="/tmp/pcwork/api-patterns-and-practices-graphql/presentation/_shared/png/00-lab-topology.png">    </p:cNvPr>
           <p:cNvPicPr>
             <a:picLocks noChangeAspect="1"/>
           </p:cNvPicPr>
@@ -26261,7 +26350,7 @@
       </p:sp>
       <p:pic>
         <p:nvPicPr>
-          <p:cNvPr id="3" name="Image 0" descr="/work/_shared/assets/logo-candidate-2.png">    </p:cNvPr>
+          <p:cNvPr id="3" name="Image 0" descr="/tmp/pcwork/api-patterns-and-practices-graphql/presentation/_shared/assets/logo-candidate-2.png">    </p:cNvPr>
           <p:cNvPicPr>
             <a:picLocks noChangeAspect="1"/>
           </p:cNvPicPr>
@@ -26807,7 +26896,7 @@
       </p:sp>
       <p:pic>
         <p:nvPicPr>
-          <p:cNvPr id="3" name="Image 0" descr="/work/_shared/assets/logo-candidate-2.png">    </p:cNvPr>
+          <p:cNvPr id="3" name="Image 0" descr="/tmp/pcwork/api-patterns-and-practices-graphql/presentation/_shared/assets/logo-candidate-2.png">    </p:cNvPr>
           <p:cNvPicPr>
             <a:picLocks noChangeAspect="1"/>
           </p:cNvPicPr>
@@ -26909,7 +26998,7 @@
       </p:sp>
       <p:pic>
         <p:nvPicPr>
-          <p:cNvPr id="6" name="Image 1" descr="/work/_shared/png/20-cross-stack-topology.png">    </p:cNvPr>
+          <p:cNvPr id="6" name="Image 1" descr="/tmp/pcwork/api-patterns-and-practices-graphql/presentation/_shared/png/20-cross-stack-topology.png">    </p:cNvPr>
           <p:cNvPicPr>
             <a:picLocks noChangeAspect="1"/>
           </p:cNvPicPr>
@@ -27113,7 +27202,7 @@
       </p:sp>
       <p:pic>
         <p:nvPicPr>
-          <p:cNvPr id="5" name="Image 0" descr="/work/_shared/assets/redhat-logo-white.png">    </p:cNvPr>
+          <p:cNvPr id="5" name="Image 0" descr="/tmp/pcwork/api-patterns-and-practices-graphql/presentation/_shared/assets/redhat-logo-white.png">    </p:cNvPr>
           <p:cNvPicPr>
             <a:picLocks noChangeAspect="1"/>
           </p:cNvPicPr>
@@ -27201,7 +27290,7 @@
       </p:sp>
       <p:pic>
         <p:nvPicPr>
-          <p:cNvPr id="3" name="Image 0" descr="/work/_shared/assets/logo-candidate-2.png">    </p:cNvPr>
+          <p:cNvPr id="3" name="Image 0" descr="/tmp/pcwork/api-patterns-and-practices-graphql/presentation/_shared/assets/logo-candidate-2.png">    </p:cNvPr>
           <p:cNvPicPr>
             <a:picLocks noChangeAspect="1"/>
           </p:cNvPicPr>
@@ -27639,7 +27728,7 @@
       </p:sp>
       <p:pic>
         <p:nvPicPr>
-          <p:cNvPr id="3" name="Image 0" descr="/work/_shared/assets/logo-candidate-2.png">    </p:cNvPr>
+          <p:cNvPr id="3" name="Image 0" descr="/tmp/pcwork/api-patterns-and-practices-graphql/presentation/_shared/assets/logo-candidate-2.png">    </p:cNvPr>
           <p:cNvPicPr>
             <a:picLocks noChangeAspect="1"/>
           </p:cNvPicPr>
@@ -28347,7 +28436,7 @@
       </p:sp>
       <p:pic>
         <p:nvPicPr>
-          <p:cNvPr id="3" name="Image 0" descr="/work/_shared/assets/logo-candidate-2.png">    </p:cNvPr>
+          <p:cNvPr id="3" name="Image 0" descr="/tmp/pcwork/api-patterns-and-practices-graphql/presentation/_shared/assets/logo-candidate-2.png">    </p:cNvPr>
           <p:cNvPicPr>
             <a:picLocks noChangeAspect="1"/>
           </p:cNvPicPr>
@@ -29061,7 +29150,7 @@
       </p:sp>
       <p:pic>
         <p:nvPicPr>
-          <p:cNvPr id="5" name="Image 0" descr="/work/_shared/assets/redhat-logo-white.png">    </p:cNvPr>
+          <p:cNvPr id="5" name="Image 0" descr="/tmp/pcwork/api-patterns-and-practices-graphql/presentation/_shared/assets/redhat-logo-white.png">    </p:cNvPr>
           <p:cNvPicPr>
             <a:picLocks noChangeAspect="1"/>
           </p:cNvPicPr>
@@ -29149,7 +29238,7 @@
       </p:sp>
       <p:pic>
         <p:nvPicPr>
-          <p:cNvPr id="3" name="Image 0" descr="/work/_shared/assets/logo-candidate-2.png">    </p:cNvPr>
+          <p:cNvPr id="3" name="Image 0" descr="/tmp/pcwork/api-patterns-and-practices-graphql/presentation/_shared/assets/logo-candidate-2.png">    </p:cNvPr>
           <p:cNvPicPr>
             <a:picLocks noChangeAspect="1"/>
           </p:cNvPicPr>
@@ -29251,7 +29340,7 @@
       </p:sp>
       <p:pic>
         <p:nvPicPr>
-          <p:cNvPr id="6" name="Image 1" descr="/work/_shared/png/23-test-layers.png">    </p:cNvPr>
+          <p:cNvPr id="6" name="Image 1" descr="/tmp/pcwork/api-patterns-and-practices-graphql/presentation/_shared/png/23-test-layers.png">    </p:cNvPr>
           <p:cNvPicPr>
             <a:picLocks noChangeAspect="1"/>
           </p:cNvPicPr>
@@ -29377,7 +29466,7 @@
       </p:sp>
       <p:pic>
         <p:nvPicPr>
-          <p:cNvPr id="3" name="Image 0" descr="/work/_shared/assets/logo-candidate-2.png">    </p:cNvPr>
+          <p:cNvPr id="3" name="Image 0" descr="/tmp/pcwork/api-patterns-and-practices-graphql/presentation/_shared/assets/logo-candidate-2.png">    </p:cNvPr>
           <p:cNvPicPr>
             <a:picLocks noChangeAspect="1"/>
           </p:cNvPicPr>
@@ -29941,7 +30030,7 @@
       </p:sp>
       <p:pic>
         <p:nvPicPr>
-          <p:cNvPr id="3" name="Image 0" descr="/work/_shared/assets/logo-candidate-2.png">    </p:cNvPr>
+          <p:cNvPr id="3" name="Image 0" descr="/tmp/pcwork/api-patterns-and-practices-graphql/presentation/_shared/assets/logo-candidate-2.png">    </p:cNvPr>
           <p:cNvPicPr>
             <a:picLocks noChangeAspect="1"/>
           </p:cNvPicPr>
@@ -30043,7 +30132,7 @@
       </p:sp>
       <p:pic>
         <p:nvPicPr>
-          <p:cNvPr id="6" name="Image 1" descr="/work/_shared/png/24-dev-vs-prod-surfaces.png">    </p:cNvPr>
+          <p:cNvPr id="6" name="Image 1" descr="/tmp/pcwork/api-patterns-and-practices-graphql/presentation/_shared/png/24-dev-vs-prod-surfaces.png">    </p:cNvPr>
           <p:cNvPicPr>
             <a:picLocks noChangeAspect="1"/>
           </p:cNvPicPr>
@@ -30169,7 +30258,7 @@
       </p:sp>
       <p:pic>
         <p:nvPicPr>
-          <p:cNvPr id="3" name="Image 0" descr="/work/_shared/assets/logo-candidate-2.png">    </p:cNvPr>
+          <p:cNvPr id="3" name="Image 0" descr="/tmp/pcwork/api-patterns-and-practices-graphql/presentation/_shared/assets/logo-candidate-2.png">    </p:cNvPr>
           <p:cNvPicPr>
             <a:picLocks noChangeAspect="1"/>
           </p:cNvPicPr>
@@ -30919,7 +31008,7 @@
       </p:sp>
       <p:pic>
         <p:nvPicPr>
-          <p:cNvPr id="5" name="Image 0" descr="/work/_shared/assets/redhat-logo-white.png">    </p:cNvPr>
+          <p:cNvPr id="5" name="Image 0" descr="/tmp/pcwork/api-patterns-and-practices-graphql/presentation/_shared/assets/redhat-logo-white.png">    </p:cNvPr>
           <p:cNvPicPr>
             <a:picLocks noChangeAspect="1"/>
           </p:cNvPicPr>
@@ -31007,7 +31096,7 @@
       </p:sp>
       <p:pic>
         <p:nvPicPr>
-          <p:cNvPr id="3" name="Image 0" descr="/work/_shared/assets/logo-candidate-2.png">    </p:cNvPr>
+          <p:cNvPr id="3" name="Image 0" descr="/tmp/pcwork/api-patterns-and-practices-graphql/presentation/_shared/assets/logo-candidate-2.png">    </p:cNvPr>
           <p:cNvPicPr>
             <a:picLocks noChangeAspect="1"/>
           </p:cNvPicPr>
@@ -31769,7 +31858,7 @@
       </p:sp>
       <p:pic>
         <p:nvPicPr>
-          <p:cNvPr id="3" name="Image 0" descr="/work/_shared/assets/logo-candidate-2.png">    </p:cNvPr>
+          <p:cNvPr id="3" name="Image 0" descr="/tmp/pcwork/api-patterns-and-practices-graphql/presentation/_shared/assets/logo-candidate-2.png">    </p:cNvPr>
           <p:cNvPicPr>
             <a:picLocks noChangeAspect="1"/>
           </p:cNvPicPr>
@@ -31871,7 +31960,7 @@
       </p:sp>
       <p:pic>
         <p:nvPicPr>
-          <p:cNvPr id="6" name="Image 1" descr="/work/_shared/png/25-compose-tier-topology.png">    </p:cNvPr>
+          <p:cNvPr id="6" name="Image 1" descr="/tmp/pcwork/api-patterns-and-practices-graphql/presentation/_shared/png/25-compose-tier-topology.png">    </p:cNvPr>
           <p:cNvPicPr>
             <a:picLocks noChangeAspect="1"/>
           </p:cNvPicPr>
@@ -31997,7 +32086,7 @@
       </p:sp>
       <p:pic>
         <p:nvPicPr>
-          <p:cNvPr id="3" name="Image 0" descr="/work/_shared/assets/logo-candidate-2.png">    </p:cNvPr>
+          <p:cNvPr id="3" name="Image 0" descr="/tmp/pcwork/api-patterns-and-practices-graphql/presentation/_shared/assets/logo-candidate-2.png">    </p:cNvPr>
           <p:cNvPicPr>
             <a:picLocks noChangeAspect="1"/>
           </p:cNvPicPr>
@@ -32741,7 +32830,7 @@
       </p:sp>
       <p:pic>
         <p:nvPicPr>
-          <p:cNvPr id="3" name="Image 0" descr="/work/_shared/assets/logo-candidate-2.png">    </p:cNvPr>
+          <p:cNvPr id="3" name="Image 0" descr="/tmp/pcwork/api-patterns-and-practices-graphql/presentation/_shared/assets/logo-candidate-2.png">    </p:cNvPr>
           <p:cNvPicPr>
             <a:picLocks noChangeAspect="1"/>
           </p:cNvPicPr>
@@ -33064,7 +33153,7 @@
       </p:sp>
       <p:pic>
         <p:nvPicPr>
-          <p:cNvPr id="3" name="Image 0" descr="/work/_shared/assets/logo-candidate-2.png">    </p:cNvPr>
+          <p:cNvPr id="3" name="Image 0" descr="/tmp/pcwork/api-patterns-and-practices-graphql/presentation/_shared/assets/logo-candidate-2.png">    </p:cNvPr>
           <p:cNvPicPr>
             <a:picLocks noChangeAspect="1"/>
           </p:cNvPicPr>
@@ -33441,7 +33530,7 @@
       </p:sp>
       <p:pic>
         <p:nvPicPr>
-          <p:cNvPr id="5" name="Image 0" descr="/work/_shared/assets/redhat-logo-white.png">    </p:cNvPr>
+          <p:cNvPr id="5" name="Image 0" descr="/tmp/pcwork/api-patterns-and-practices-graphql/presentation/_shared/assets/redhat-logo-white.png">    </p:cNvPr>
           <p:cNvPicPr>
             <a:picLocks noChangeAspect="1"/>
           </p:cNvPicPr>
@@ -33529,7 +33618,7 @@
       </p:sp>
       <p:pic>
         <p:nvPicPr>
-          <p:cNvPr id="3" name="Image 0" descr="/work/_shared/assets/logo-candidate-2.png">    </p:cNvPr>
+          <p:cNvPr id="3" name="Image 0" descr="/tmp/pcwork/api-patterns-and-practices-graphql/presentation/_shared/assets/logo-candidate-2.png">    </p:cNvPr>
           <p:cNvPicPr>
             <a:picLocks noChangeAspect="1"/>
           </p:cNvPicPr>
@@ -34237,7 +34326,7 @@
       </p:sp>
       <p:pic>
         <p:nvPicPr>
-          <p:cNvPr id="3" name="Image 0" descr="/work/_shared/assets/logo-candidate-2.png">    </p:cNvPr>
+          <p:cNvPr id="3" name="Image 0" descr="/tmp/pcwork/api-patterns-and-practices-graphql/presentation/_shared/assets/logo-candidate-2.png">    </p:cNvPr>
           <p:cNvPicPr>
             <a:picLocks noChangeAspect="1"/>
           </p:cNvPicPr>
@@ -34999,7 +35088,7 @@
       </p:sp>
       <p:pic>
         <p:nvPicPr>
-          <p:cNvPr id="3" name="Image 0" descr="/work/_shared/assets/logo-candidate-2.png">    </p:cNvPr>
+          <p:cNvPr id="3" name="Image 0" descr="/tmp/pcwork/api-patterns-and-practices-graphql/presentation/_shared/assets/logo-candidate-2.png">    </p:cNvPr>
           <p:cNvPicPr>
             <a:picLocks noChangeAspect="1"/>
           </p:cNvPicPr>
@@ -35761,7 +35850,7 @@
       </p:sp>
       <p:pic>
         <p:nvPicPr>
-          <p:cNvPr id="3" name="Image 0" descr="/work/_shared/assets/logo-candidate-2.png">    </p:cNvPr>
+          <p:cNvPr id="3" name="Image 0" descr="/tmp/pcwork/api-patterns-and-practices-graphql/presentation/_shared/assets/logo-candidate-2.png">    </p:cNvPr>
           <p:cNvPicPr>
             <a:picLocks noChangeAspect="1"/>
           </p:cNvPicPr>
@@ -36433,7 +36522,7 @@
       </p:sp>
       <p:pic>
         <p:nvPicPr>
-          <p:cNvPr id="3" name="Image 0" descr="/work/_shared/assets/logo-candidate-2.png">    </p:cNvPr>
+          <p:cNvPr id="3" name="Image 0" descr="/tmp/pcwork/api-patterns-and-practices-graphql/presentation/_shared/assets/logo-candidate-2.png">    </p:cNvPr>
           <p:cNvPicPr>
             <a:picLocks noChangeAspect="1"/>
           </p:cNvPicPr>
@@ -36535,7 +36624,7 @@
       </p:sp>
       <p:pic>
         <p:nvPicPr>
-          <p:cNvPr id="6" name="Image 1" descr="/work/_shared/png/A-in-cluster-build.png">    </p:cNvPr>
+          <p:cNvPr id="6" name="Image 1" descr="/tmp/pcwork/api-patterns-and-practices-graphql/presentation/_shared/png/A-in-cluster-build.png">    </p:cNvPr>
           <p:cNvPicPr>
             <a:picLocks noChangeAspect="1"/>
           </p:cNvPicPr>
@@ -36592,6 +36681,454 @@
               <a:t>Figure A.2 — One image, built where it runs.</a:t>
             </a:r>
             <a:endParaRPr lang="en-US" sz="1300" dirty="0"/>
+          </a:p>
+        </p:txBody>
+      </p:sp>
+    </p:spTree>
+  </p:cSld>
+  <p:clrMapOvr>
+    <a:masterClrMapping/>
+  </p:clrMapOvr>
+</p:sld>
+</file>
+
+<file path=ppt/slides/slide71.xml><?xml version="1.0" encoding="utf-8"?>
+<p:sld xmlns:a="http://schemas.openxmlformats.org/drawingml/2006/main" xmlns:r="http://schemas.openxmlformats.org/officeDocument/2006/relationships" xmlns:p="http://schemas.openxmlformats.org/presentationml/2006/main">
+  <p:cSld name="Slide 71">
+    <p:spTree>
+      <p:nvGrpSpPr>
+        <p:cNvPr id="1" name=""/>
+        <p:cNvGrpSpPr/>
+        <p:nvPr/>
+      </p:nvGrpSpPr>
+      <p:grpSpPr>
+        <a:xfrm>
+          <a:off x="0" y="0"/>
+          <a:ext cx="0" cy="0"/>
+          <a:chOff x="0" y="0"/>
+          <a:chExt cx="0" cy="0"/>
+        </a:xfrm>
+      </p:grpSpPr>
+      <p:sp>
+        <p:nvSpPr>
+          <p:cNvPr id="2" name="Text 0"/>
+          <p:cNvSpPr/>
+          <p:nvPr/>
+        </p:nvSpPr>
+        <p:spPr>
+          <a:xfrm>
+            <a:off x="566928" y="6364224"/>
+            <a:ext cx="914400" cy="274320"/>
+          </a:xfrm>
+          <a:prstGeom prst="rect">
+            <a:avLst/>
+          </a:prstGeom>
+          <a:noFill/>
+          <a:ln/>
+        </p:spPr>
+        <p:txBody>
+          <a:bodyPr wrap="square" rtlCol="0" anchor="ctr"/>
+          <a:lstStyle/>
+          <a:p>
+            <a:pPr algn="l" indent="0" marL="0">
+              <a:buNone/>
+            </a:pPr>
+            <a:r>
+              <a:rPr lang="en-US" sz="1000" dirty="0">
+                <a:solidFill>
+                  <a:srgbClr val="8A8A8A"/>
+                </a:solidFill>
+                <a:latin typeface="Red Hat Text" pitchFamily="34" charset="0"/>
+                <a:ea typeface="Red Hat Text" pitchFamily="34" charset="-122"/>
+                <a:cs typeface="Red Hat Text" pitchFamily="34" charset="-120"/>
+              </a:rPr>
+              <a:t>71</a:t>
+            </a:r>
+            <a:endParaRPr lang="en-US" sz="1000" dirty="0"/>
+          </a:p>
+        </p:txBody>
+      </p:sp>
+      <p:pic>
+        <p:nvPicPr>
+          <p:cNvPr id="3" name="Image 0" descr="/tmp/pcwork/api-patterns-and-practices-graphql/presentation/_shared/assets/logo-candidate-2.png">    </p:cNvPr>
+          <p:cNvPicPr>
+            <a:picLocks noChangeAspect="1"/>
+          </p:cNvPicPr>
+          <p:nvPr/>
+        </p:nvPicPr>
+        <p:blipFill>
+          <a:blip r:embed="rId1"/>
+          <a:stretch>
+            <a:fillRect/>
+          </a:stretch>
+        </p:blipFill>
+        <p:spPr>
+          <a:xfrm>
+            <a:off x="10561320" y="6355080"/>
+            <a:ext cx="1033272" cy="246888"/>
+          </a:xfrm>
+          <a:prstGeom prst="rect">
+            <a:avLst/>
+          </a:prstGeom>
+        </p:spPr>
+      </p:pic>
+      <p:sp>
+        <p:nvSpPr>
+          <p:cNvPr id="4" name="Text 1"/>
+          <p:cNvSpPr/>
+          <p:nvPr/>
+        </p:nvSpPr>
+        <p:spPr>
+          <a:xfrm>
+            <a:off x="566928" y="384048"/>
+            <a:ext cx="11055096" cy="292608"/>
+          </a:xfrm>
+          <a:prstGeom prst="rect">
+            <a:avLst/>
+          </a:prstGeom>
+          <a:noFill/>
+          <a:ln/>
+        </p:spPr>
+        <p:txBody>
+          <a:bodyPr wrap="square" rtlCol="0" anchor="ctr"/>
+          <a:lstStyle/>
+          <a:p>
+            <a:pPr algn="l" indent="0" marL="0">
+              <a:buNone/>
+            </a:pPr>
+            <a:r>
+              <a:rPr lang="en-US" sz="1200" b="1" spc="400" kern="0" dirty="0">
+                <a:solidFill>
+                  <a:srgbClr val="EE0000"/>
+                </a:solidFill>
+                <a:latin typeface="Red Hat Display" pitchFamily="34" charset="0"/>
+                <a:ea typeface="Red Hat Display" pitchFamily="34" charset="-122"/>
+                <a:cs typeface="Red Hat Display" pitchFamily="34" charset="-120"/>
+              </a:rPr>
+              <a:t>SCAN TO EXPLORE</a:t>
+            </a:r>
+            <a:endParaRPr lang="en-US" sz="1200" dirty="0"/>
+          </a:p>
+        </p:txBody>
+      </p:sp>
+      <p:sp>
+        <p:nvSpPr>
+          <p:cNvPr id="5" name="Text 2"/>
+          <p:cNvSpPr/>
+          <p:nvPr/>
+        </p:nvSpPr>
+        <p:spPr>
+          <a:xfrm>
+            <a:off x="566928" y="676656"/>
+            <a:ext cx="11055096" cy="1005840"/>
+          </a:xfrm>
+          <a:prstGeom prst="rect">
+            <a:avLst/>
+          </a:prstGeom>
+          <a:noFill/>
+          <a:ln/>
+        </p:spPr>
+        <p:txBody>
+          <a:bodyPr wrap="square" rtlCol="0" anchor="t"/>
+          <a:lstStyle/>
+          <a:p>
+            <a:pPr algn="l" indent="0" marL="0">
+              <a:buNone/>
+            </a:pPr>
+            <a:r>
+              <a:rPr lang="en-US" sz="3000" b="1" dirty="0">
+                <a:solidFill>
+                  <a:srgbClr val="151515"/>
+                </a:solidFill>
+                <a:latin typeface="Red Hat Display" pitchFamily="34" charset="0"/>
+                <a:ea typeface="Red Hat Display" pitchFamily="34" charset="-122"/>
+                <a:cs typeface="Red Hat Display" pitchFamily="34" charset="-120"/>
+              </a:rPr>
+              <a:t>Take it with you</a:t>
+            </a:r>
+            <a:endParaRPr lang="en-US" sz="3000" dirty="0"/>
+          </a:p>
+        </p:txBody>
+      </p:sp>
+      <p:pic>
+        <p:nvPicPr>
+          <p:cNvPr id="6" name="Image 1" descr="/tmp/pcwork/api-patterns-and-practices-graphql/presentation/_shared/assets/qr-graphql-site.png">    </p:cNvPr>
+          <p:cNvPicPr>
+            <a:picLocks noChangeAspect="1"/>
+          </p:cNvPicPr>
+          <p:nvPr/>
+        </p:nvPicPr>
+        <p:blipFill>
+          <a:blip r:embed="rId2"/>
+          <a:stretch>
+            <a:fillRect/>
+          </a:stretch>
+        </p:blipFill>
+        <p:spPr>
+          <a:xfrm>
+            <a:off x="2103120" y="1627632"/>
+            <a:ext cx="2834640" cy="2834640"/>
+          </a:xfrm>
+          <a:prstGeom prst="rect">
+            <a:avLst/>
+          </a:prstGeom>
+        </p:spPr>
+      </p:pic>
+      <p:sp>
+        <p:nvSpPr>
+          <p:cNvPr id="7" name="Text 3"/>
+          <p:cNvSpPr/>
+          <p:nvPr/>
+        </p:nvSpPr>
+        <p:spPr>
+          <a:xfrm>
+            <a:off x="1417320" y="4553712"/>
+            <a:ext cx="4206240" cy="365760"/>
+          </a:xfrm>
+          <a:prstGeom prst="rect">
+            <a:avLst/>
+          </a:prstGeom>
+          <a:noFill/>
+          <a:ln/>
+        </p:spPr>
+        <p:txBody>
+          <a:bodyPr wrap="square" rtlCol="0" anchor="ctr"/>
+          <a:lstStyle/>
+          <a:p>
+            <a:pPr algn="ctr" indent="0" marL="0">
+              <a:buNone/>
+            </a:pPr>
+            <a:r>
+              <a:rPr lang="en-US" sz="1800" b="1" dirty="0">
+                <a:solidFill>
+                  <a:srgbClr val="151515"/>
+                </a:solidFill>
+                <a:latin typeface="Red Hat Display" pitchFamily="34" charset="0"/>
+                <a:ea typeface="Red Hat Display" pitchFamily="34" charset="-122"/>
+                <a:cs typeface="Red Hat Display" pitchFamily="34" charset="-120"/>
+              </a:rPr>
+              <a:t>The site</a:t>
+            </a:r>
+            <a:endParaRPr lang="en-US" sz="1800" dirty="0"/>
+          </a:p>
+        </p:txBody>
+      </p:sp>
+      <p:sp>
+        <p:nvSpPr>
+          <p:cNvPr id="8" name="Text 4"/>
+          <p:cNvSpPr/>
+          <p:nvPr/>
+        </p:nvSpPr>
+        <p:spPr>
+          <a:xfrm>
+            <a:off x="1325880" y="4937760"/>
+            <a:ext cx="4389120" cy="658368"/>
+          </a:xfrm>
+          <a:prstGeom prst="rect">
+            <a:avLst/>
+          </a:prstGeom>
+          <a:noFill/>
+          <a:ln/>
+        </p:spPr>
+        <p:txBody>
+          <a:bodyPr wrap="square" rtlCol="0" anchor="t"/>
+          <a:lstStyle/>
+          <a:p>
+            <a:pPr algn="ctr" indent="0" marL="0">
+              <a:buNone/>
+            </a:pPr>
+            <a:r>
+              <a:rPr lang="en-US" sz="1300" i="1" dirty="0">
+                <a:solidFill>
+                  <a:srgbClr val="5A5A5A"/>
+                </a:solidFill>
+                <a:latin typeface="Red Hat Text" pitchFamily="34" charset="0"/>
+                <a:ea typeface="Red Hat Text" pitchFamily="34" charset="-122"/>
+                <a:cs typeface="Red Hat Text" pitchFamily="34" charset="-120"/>
+              </a:rPr>
+              <a:t>Chapters, the GraphQL schema and contracts, and both-stack runnable examples</a:t>
+            </a:r>
+            <a:endParaRPr lang="en-US" sz="1300" dirty="0"/>
+          </a:p>
+        </p:txBody>
+      </p:sp>
+      <p:sp>
+        <p:nvSpPr>
+          <p:cNvPr id="9" name="Text 5"/>
+          <p:cNvSpPr/>
+          <p:nvPr/>
+        </p:nvSpPr>
+        <p:spPr>
+          <a:xfrm>
+            <a:off x="1325880" y="5596128"/>
+            <a:ext cx="4389120" cy="292608"/>
+          </a:xfrm>
+          <a:prstGeom prst="rect">
+            <a:avLst/>
+          </a:prstGeom>
+          <a:noFill/>
+          <a:ln/>
+        </p:spPr>
+        <p:txBody>
+          <a:bodyPr wrap="square" rtlCol="0" anchor="ctr"/>
+          <a:lstStyle/>
+          <a:p>
+            <a:pPr algn="ctr" indent="0" marL="0">
+              <a:buNone/>
+            </a:pPr>
+            <a:r>
+              <a:rPr lang="en-US" sz="1000" dirty="0">
+                <a:solidFill>
+                  <a:srgbClr val="EE0000"/>
+                </a:solidFill>
+                <a:latin typeface="Red Hat Mono" pitchFamily="34" charset="0"/>
+                <a:ea typeface="Red Hat Mono" pitchFamily="34" charset="-122"/>
+                <a:cs typeface="Red Hat Mono" pitchFamily="34" charset="-120"/>
+              </a:rPr>
+              <a:t>patterncatalyst.github.io/api-patterns-and-practices-graphql</a:t>
+            </a:r>
+            <a:endParaRPr lang="en-US" sz="1000" dirty="0"/>
+          </a:p>
+        </p:txBody>
+      </p:sp>
+      <p:pic>
+        <p:nvPicPr>
+          <p:cNvPr id="10" name="Image 2" descr="/tmp/pcwork/api-patterns-and-practices-graphql/presentation/_shared/assets/qr-hub.png">    </p:cNvPr>
+          <p:cNvPicPr>
+            <a:picLocks noChangeAspect="1"/>
+          </p:cNvPicPr>
+          <p:nvPr/>
+        </p:nvPicPr>
+        <p:blipFill>
+          <a:blip r:embed="rId3"/>
+          <a:stretch>
+            <a:fillRect/>
+          </a:stretch>
+        </p:blipFill>
+        <p:spPr>
+          <a:xfrm>
+            <a:off x="7251192" y="1627632"/>
+            <a:ext cx="2834640" cy="2834640"/>
+          </a:xfrm>
+          <a:prstGeom prst="rect">
+            <a:avLst/>
+          </a:prstGeom>
+        </p:spPr>
+      </p:pic>
+      <p:sp>
+        <p:nvSpPr>
+          <p:cNvPr id="11" name="Text 6"/>
+          <p:cNvSpPr/>
+          <p:nvPr/>
+        </p:nvSpPr>
+        <p:spPr>
+          <a:xfrm>
+            <a:off x="6565392" y="4553712"/>
+            <a:ext cx="4206240" cy="365760"/>
+          </a:xfrm>
+          <a:prstGeom prst="rect">
+            <a:avLst/>
+          </a:prstGeom>
+          <a:noFill/>
+          <a:ln/>
+        </p:spPr>
+        <p:txBody>
+          <a:bodyPr wrap="square" rtlCol="0" anchor="ctr"/>
+          <a:lstStyle/>
+          <a:p>
+            <a:pPr algn="ctr" indent="0" marL="0">
+              <a:buNone/>
+            </a:pPr>
+            <a:r>
+              <a:rPr lang="en-US" sz="1800" b="1" dirty="0">
+                <a:solidFill>
+                  <a:srgbClr val="151515"/>
+                </a:solidFill>
+                <a:latin typeface="Red Hat Display" pitchFamily="34" charset="0"/>
+                <a:ea typeface="Red Hat Display" pitchFamily="34" charset="-122"/>
+                <a:cs typeface="Red Hat Display" pitchFamily="34" charset="-120"/>
+              </a:rPr>
+              <a:t>Workshops &amp; Tutorials</a:t>
+            </a:r>
+            <a:endParaRPr lang="en-US" sz="1800" dirty="0"/>
+          </a:p>
+        </p:txBody>
+      </p:sp>
+      <p:sp>
+        <p:nvSpPr>
+          <p:cNvPr id="12" name="Text 7"/>
+          <p:cNvSpPr/>
+          <p:nvPr/>
+        </p:nvSpPr>
+        <p:spPr>
+          <a:xfrm>
+            <a:off x="6473952" y="4937760"/>
+            <a:ext cx="4389120" cy="658368"/>
+          </a:xfrm>
+          <a:prstGeom prst="rect">
+            <a:avLst/>
+          </a:prstGeom>
+          <a:noFill/>
+          <a:ln/>
+        </p:spPr>
+        <p:txBody>
+          <a:bodyPr wrap="square" rtlCol="0" anchor="t"/>
+          <a:lstStyle/>
+          <a:p>
+            <a:pPr algn="ctr" indent="0" marL="0">
+              <a:buNone/>
+            </a:pPr>
+            <a:r>
+              <a:rPr lang="en-US" sz="1300" i="1" dirty="0">
+                <a:solidFill>
+                  <a:srgbClr val="5A5A5A"/>
+                </a:solidFill>
+                <a:latin typeface="Red Hat Text" pitchFamily="34" charset="0"/>
+                <a:ea typeface="Red Hat Text" pitchFamily="34" charset="-122"/>
+                <a:cs typeface="Red Hat Text" pitchFamily="34" charset="-120"/>
+              </a:rPr>
+              <a:t>The whole series: every workshop, tutorial, and deck in one place</a:t>
+            </a:r>
+            <a:endParaRPr lang="en-US" sz="1300" dirty="0"/>
+          </a:p>
+        </p:txBody>
+      </p:sp>
+      <p:sp>
+        <p:nvSpPr>
+          <p:cNvPr id="13" name="Text 8"/>
+          <p:cNvSpPr/>
+          <p:nvPr/>
+        </p:nvSpPr>
+        <p:spPr>
+          <a:xfrm>
+            <a:off x="6473952" y="5596128"/>
+            <a:ext cx="4389120" cy="292608"/>
+          </a:xfrm>
+          <a:prstGeom prst="rect">
+            <a:avLst/>
+          </a:prstGeom>
+          <a:noFill/>
+          <a:ln/>
+        </p:spPr>
+        <p:txBody>
+          <a:bodyPr wrap="square" rtlCol="0" anchor="ctr"/>
+          <a:lstStyle/>
+          <a:p>
+            <a:pPr algn="ctr" indent="0" marL="0">
+              <a:buNone/>
+            </a:pPr>
+            <a:r>
+              <a:rPr lang="en-US" sz="900" dirty="0">
+                <a:solidFill>
+                  <a:srgbClr val="EE0000"/>
+                </a:solidFill>
+                <a:latin typeface="Red Hat Mono" pitchFamily="34" charset="0"/>
+                <a:ea typeface="Red Hat Mono" pitchFamily="34" charset="-122"/>
+                <a:cs typeface="Red Hat Mono" pitchFamily="34" charset="-120"/>
+              </a:rPr>
+              <a:t>patterncatalyst.github.io/patterncatalyst-workshops-tutorials-list</a:t>
+            </a:r>
+            <a:endParaRPr lang="en-US" sz="900" dirty="0"/>
           </a:p>
         </p:txBody>
       </p:sp>
@@ -36661,7 +37198,7 @@
       </p:sp>
       <p:pic>
         <p:nvPicPr>
-          <p:cNvPr id="3" name="Image 0" descr="/work/_shared/assets/logo-candidate-2.png">    </p:cNvPr>
+          <p:cNvPr id="3" name="Image 0" descr="/tmp/pcwork/api-patterns-and-practices-graphql/presentation/_shared/assets/logo-candidate-2.png">    </p:cNvPr>
           <p:cNvPicPr>
             <a:picLocks noChangeAspect="1"/>
           </p:cNvPicPr>
@@ -37357,7 +37894,7 @@
       </p:sp>
       <p:pic>
         <p:nvPicPr>
-          <p:cNvPr id="5" name="Image 0" descr="/work/_shared/assets/redhat-logo-white.png">    </p:cNvPr>
+          <p:cNvPr id="5" name="Image 0" descr="/tmp/pcwork/api-patterns-and-practices-graphql/presentation/_shared/assets/redhat-logo-white.png">    </p:cNvPr>
           <p:cNvPicPr>
             <a:picLocks noChangeAspect="1"/>
           </p:cNvPicPr>

--- a/presentation/api-patterns-graphql-quarkus/api-patterns-graphql-quarkus.pptx
+++ b/presentation/api-patterns-graphql-quarkus/api-patterns-graphql-quarkus.pptx
@@ -924,7 +924,7 @@
           <a:p>
             <a:r>
               <a:rPr lang="en-US" dirty="0"/>
-              <a:t>This section covers how a request becomes work. The engine parses and validates the document, coerces variables, then walks the selection set calling a resolver per field. In Quarkus the useful idiom is that a resolver which reads a source returns Mutiny's Uni, a lazy single-value type, so the engine receives a pending result instead of a blocked thread and can start sibling fields before any of them finish. Chapter 6 covers the execution model and Chapter 7 covers queries, resolvers and the request context.</a:t>
+              <a:t>How a request becomes work: the engine parses and validates the document, coerces variables, then walks the selection set calling a resolver per field. In Quarkus the useful idiom is that a resolver which reads a source returns Mutiny's Uni, a lazy single-value type, so the engine receives a pending result instead of a blocked thread and can start sibling fields before any of them finish. The execution model and the resolver's inputs, including the request context, sit behind this.</a:t>
             </a:r>
             <a:endParaRPr lang="en-US" dirty="0"/>
           </a:p>
@@ -3564,7 +3564,7 @@
           <a:p>
             <a:r>
               <a:rPr lang="en-US" dirty="0"/>
-              <a:t>This section covers what protects the endpoint and what each caller may do. The transport has to be encrypted, size-limited and open only to the browser origin that needs it. The schema map that introspection exposes is turned off on instances that anonymous callers reach, and left on for the instances that developers and CI use. Identity comes from a bearer token validated by the framework, and authorization is stated in three layers: operation, object and field. Chapters 17 and 18 cover the two halves.</a:t>
+              <a:t>What protects the endpoint and what each caller may do: the transport has to be encrypted, size-limited and open only to the browser origin that needs it. The schema map that introspection exposes is turned off on instances that anonymous callers reach, and left on for the instances that developers and CI use. Identity comes from a bearer token validated by the framework, and authorization is stated in three layers: operation, object and field. Transport security and authorization cover the two halves.</a:t>
             </a:r>
             <a:endParaRPr lang="en-US" dirty="0"/>
           </a:p>
@@ -7147,7 +7147,7 @@
       </p:grpSpPr>
       <p:pic>
         <p:nvPicPr>
-          <p:cNvPr id="2" name="Image 0" descr="/tmp/pcwork/api-patterns-and-practices-graphql/presentation/_shared/assets/cover-panel.png">    </p:cNvPr>
+          <p:cNvPr id="2" name="Image 0" descr="/work/_shared/assets/cover-panel.png">    </p:cNvPr>
           <p:cNvPicPr>
             <a:picLocks noChangeAspect="1"/>
           </p:cNvPicPr>
@@ -7361,7 +7361,7 @@
       </p:sp>
       <p:pic>
         <p:nvPicPr>
-          <p:cNvPr id="7" name="Image 1" descr="/tmp/pcwork/api-patterns-and-practices-graphql/presentation/_shared/assets/logo-candidate-2.png">    </p:cNvPr>
+          <p:cNvPr id="7" name="Image 1" descr="/work/_shared/assets/logo-candidate-2.png">    </p:cNvPr>
           <p:cNvPicPr>
             <a:picLocks noChangeAspect="1"/>
           </p:cNvPicPr>
@@ -7449,7 +7449,7 @@
       </p:sp>
       <p:pic>
         <p:nvPicPr>
-          <p:cNvPr id="3" name="Image 0" descr="/tmp/pcwork/api-patterns-and-practices-graphql/presentation/_shared/assets/logo-candidate-2.png">    </p:cNvPr>
+          <p:cNvPr id="3" name="Image 0" descr="/work/_shared/assets/logo-candidate-2.png">    </p:cNvPr>
           <p:cNvPicPr>
             <a:picLocks noChangeAspect="1"/>
           </p:cNvPicPr>
@@ -7977,7 +7977,7 @@
       </p:sp>
       <p:pic>
         <p:nvPicPr>
-          <p:cNvPr id="3" name="Image 0" descr="/tmp/pcwork/api-patterns-and-practices-graphql/presentation/_shared/assets/logo-candidate-2.png">    </p:cNvPr>
+          <p:cNvPr id="3" name="Image 0" descr="/work/_shared/assets/logo-candidate-2.png">    </p:cNvPr>
           <p:cNvPicPr>
             <a:picLocks noChangeAspect="1"/>
           </p:cNvPicPr>
@@ -8079,7 +8079,7 @@
       </p:sp>
       <p:pic>
         <p:nvPicPr>
-          <p:cNvPr id="6" name="Image 1" descr="/tmp/pcwork/api-patterns-and-practices-graphql/presentation/_shared/png/05-two-direction-diff.png">    </p:cNvPr>
+          <p:cNvPr id="6" name="Image 1" descr="/work/_shared/png/05-two-direction-diff.png">    </p:cNvPr>
           <p:cNvPicPr>
             <a:picLocks noChangeAspect="1"/>
           </p:cNvPicPr>
@@ -8133,7 +8133,7 @@
                 <a:ea typeface="Red Hat Text" pitchFamily="34" charset="-122"/>
                 <a:cs typeface="Red Hat Text" pitchFamily="34" charset="-120"/>
               </a:rPr>
-              <a:t>Figure 5.2 — Each seeded drift is reported by one direction; only canonical to live may ignore a slice.</a:t>
+              <a:t>Figure 5.2: Each seeded drift is reported by one direction; only canonical to live may ignore a slice.</a:t>
             </a:r>
             <a:endParaRPr lang="en-US" sz="1300" dirty="0"/>
           </a:p>
@@ -8205,7 +8205,7 @@
       </p:sp>
       <p:pic>
         <p:nvPicPr>
-          <p:cNvPr id="3" name="Image 0" descr="/tmp/pcwork/api-patterns-and-practices-graphql/presentation/_shared/assets/logo-candidate-2.png">    </p:cNvPr>
+          <p:cNvPr id="3" name="Image 0" descr="/work/_shared/assets/logo-candidate-2.png">    </p:cNvPr>
           <p:cNvPicPr>
             <a:picLocks noChangeAspect="1"/>
           </p:cNvPicPr>
@@ -8739,7 +8739,7 @@
       </p:sp>
       <p:pic>
         <p:nvPicPr>
-          <p:cNvPr id="5" name="Image 0" descr="/tmp/pcwork/api-patterns-and-practices-graphql/presentation/_shared/assets/redhat-logo-white.png">    </p:cNvPr>
+          <p:cNvPr id="5" name="Image 0" descr="/work/_shared/assets/redhat-logo-white.png">    </p:cNvPr>
           <p:cNvPicPr>
             <a:picLocks noChangeAspect="1"/>
           </p:cNvPicPr>
@@ -8827,7 +8827,7 @@
       </p:sp>
       <p:pic>
         <p:nvPicPr>
-          <p:cNvPr id="3" name="Image 0" descr="/tmp/pcwork/api-patterns-and-practices-graphql/presentation/_shared/assets/logo-candidate-2.png">    </p:cNvPr>
+          <p:cNvPr id="3" name="Image 0" descr="/work/_shared/assets/logo-candidate-2.png">    </p:cNvPr>
           <p:cNvPicPr>
             <a:picLocks noChangeAspect="1"/>
           </p:cNvPicPr>
@@ -8929,7 +8929,7 @@
       </p:sp>
       <p:pic>
         <p:nvPicPr>
-          <p:cNvPr id="6" name="Image 1" descr="/tmp/pcwork/api-patterns-and-practices-graphql/presentation/_shared/png/06-parallel-siblings.png">    </p:cNvPr>
+          <p:cNvPr id="6" name="Image 1" descr="/work/_shared/png/06-parallel-siblings.png">    </p:cNvPr>
           <p:cNvPicPr>
             <a:picLocks noChangeAspect="1"/>
           </p:cNvPicPr>
@@ -8983,7 +8983,7 @@
                 <a:ea typeface="Red Hat Text" pitchFamily="34" charset="-122"/>
                 <a:cs typeface="Red Hat Text" pitchFamily="34" charset="-120"/>
               </a:rPr>
-              <a:t>Figure 6.3 — Sibling resolvers overlap in time in one Quarkus run.</a:t>
+              <a:t>Figure 6.3: Sibling resolvers overlap in time in one Quarkus run.</a:t>
             </a:r>
             <a:endParaRPr lang="en-US" sz="1300" dirty="0"/>
           </a:p>
@@ -9055,7 +9055,7 @@
       </p:sp>
       <p:pic>
         <p:nvPicPr>
-          <p:cNvPr id="3" name="Image 0" descr="/tmp/pcwork/api-patterns-and-practices-graphql/presentation/_shared/assets/logo-candidate-2.png">    </p:cNvPr>
+          <p:cNvPr id="3" name="Image 0" descr="/work/_shared/assets/logo-candidate-2.png">    </p:cNvPr>
           <p:cNvPicPr>
             <a:picLocks noChangeAspect="1"/>
           </p:cNvPicPr>
@@ -9655,7 +9655,7 @@
       </p:sp>
       <p:pic>
         <p:nvPicPr>
-          <p:cNvPr id="3" name="Image 0" descr="/tmp/pcwork/api-patterns-and-practices-graphql/presentation/_shared/assets/logo-candidate-2.png">    </p:cNvPr>
+          <p:cNvPr id="3" name="Image 0" descr="/work/_shared/assets/logo-candidate-2.png">    </p:cNvPr>
           <p:cNvPicPr>
             <a:picLocks noChangeAspect="1"/>
           </p:cNvPicPr>
@@ -10345,7 +10345,7 @@
       </p:sp>
       <p:pic>
         <p:nvPicPr>
-          <p:cNvPr id="3" name="Image 0" descr="/tmp/pcwork/api-patterns-and-practices-graphql/presentation/_shared/assets/logo-candidate-2.png">    </p:cNvPr>
+          <p:cNvPr id="3" name="Image 0" descr="/work/_shared/assets/logo-candidate-2.png">    </p:cNvPr>
           <p:cNvPicPr>
             <a:picLocks noChangeAspect="1"/>
           </p:cNvPicPr>
@@ -11023,7 +11023,7 @@
       </p:sp>
       <p:pic>
         <p:nvPicPr>
-          <p:cNvPr id="5" name="Image 0" descr="/tmp/pcwork/api-patterns-and-practices-graphql/presentation/_shared/assets/redhat-logo-white.png">    </p:cNvPr>
+          <p:cNvPr id="5" name="Image 0" descr="/work/_shared/assets/redhat-logo-white.png">    </p:cNvPr>
           <p:cNvPicPr>
             <a:picLocks noChangeAspect="1"/>
           </p:cNvPicPr>
@@ -11111,7 +11111,7 @@
       </p:sp>
       <p:pic>
         <p:nvPicPr>
-          <p:cNvPr id="3" name="Image 0" descr="/tmp/pcwork/api-patterns-and-practices-graphql/presentation/_shared/assets/logo-candidate-2.png">    </p:cNvPr>
+          <p:cNvPr id="3" name="Image 0" descr="/work/_shared/assets/logo-candidate-2.png">    </p:cNvPr>
           <p:cNvPicPr>
             <a:picLocks noChangeAspect="1"/>
           </p:cNvPicPr>
@@ -11621,7 +11621,7 @@
       </p:sp>
       <p:pic>
         <p:nvPicPr>
-          <p:cNvPr id="3" name="Image 0" descr="/tmp/pcwork/api-patterns-and-practices-graphql/presentation/_shared/assets/logo-candidate-2.png">    </p:cNvPr>
+          <p:cNvPr id="3" name="Image 0" descr="/work/_shared/assets/logo-candidate-2.png">    </p:cNvPr>
           <p:cNvPicPr>
             <a:picLocks noChangeAspect="1"/>
           </p:cNvPicPr>
@@ -12119,7 +12119,7 @@
       </p:sp>
       <p:pic>
         <p:nvPicPr>
-          <p:cNvPr id="3" name="Image 0" descr="/tmp/pcwork/api-patterns-and-practices-graphql/presentation/_shared/assets/logo-candidate-2.png">    </p:cNvPr>
+          <p:cNvPr id="3" name="Image 0" descr="/work/_shared/assets/logo-candidate-2.png">    </p:cNvPr>
           <p:cNvPicPr>
             <a:picLocks noChangeAspect="1"/>
           </p:cNvPicPr>
@@ -12755,7 +12755,7 @@
       </p:sp>
       <p:pic>
         <p:nvPicPr>
-          <p:cNvPr id="3" name="Image 0" descr="/tmp/pcwork/api-patterns-and-practices-graphql/presentation/_shared/assets/logo-candidate-2.png">    </p:cNvPr>
+          <p:cNvPr id="3" name="Image 0" descr="/work/_shared/assets/logo-candidate-2.png">    </p:cNvPr>
           <p:cNvPicPr>
             <a:picLocks noChangeAspect="1"/>
           </p:cNvPicPr>
@@ -13337,7 +13337,7 @@
       </p:sp>
       <p:pic>
         <p:nvPicPr>
-          <p:cNvPr id="3" name="Image 0" descr="/tmp/pcwork/api-patterns-and-practices-graphql/presentation/_shared/assets/logo-candidate-2.png">    </p:cNvPr>
+          <p:cNvPr id="3" name="Image 0" descr="/work/_shared/assets/logo-candidate-2.png">    </p:cNvPr>
           <p:cNvPicPr>
             <a:picLocks noChangeAspect="1"/>
           </p:cNvPicPr>
@@ -13439,7 +13439,7 @@
       </p:sp>
       <p:pic>
         <p:nvPicPr>
-          <p:cNvPr id="6" name="Image 1" descr="/tmp/pcwork/api-patterns-and-practices-graphql/presentation/_shared/png/09-error-masking.png">    </p:cNvPr>
+          <p:cNvPr id="6" name="Image 1" descr="/work/_shared/png/09-error-masking.png">    </p:cNvPr>
           <p:cNvPicPr>
             <a:picLocks noChangeAspect="1"/>
           </p:cNvPicPr>
@@ -13493,7 +13493,7 @@
                 <a:ea typeface="Red Hat Text" pitchFamily="34" charset="-122"/>
                 <a:cs typeface="Red Hat Text" pitchFamily="34" charset="-120"/>
               </a:rPr>
-              <a:t>Figure 9.3 — Masking is an allowlist: the client sees only what the service listed.</a:t>
+              <a:t>Figure 9.3: Masking is an allowlist: the client sees only what the service listed.</a:t>
             </a:r>
             <a:endParaRPr lang="en-US" sz="1300" dirty="0"/>
           </a:p>
@@ -13565,7 +13565,7 @@
       </p:sp>
       <p:pic>
         <p:nvPicPr>
-          <p:cNvPr id="3" name="Image 0" descr="/tmp/pcwork/api-patterns-and-practices-graphql/presentation/_shared/assets/logo-candidate-2.png">    </p:cNvPr>
+          <p:cNvPr id="3" name="Image 0" descr="/work/_shared/assets/logo-candidate-2.png">    </p:cNvPr>
           <p:cNvPicPr>
             <a:picLocks noChangeAspect="1"/>
           </p:cNvPicPr>
@@ -14207,7 +14207,7 @@
       </p:sp>
       <p:pic>
         <p:nvPicPr>
-          <p:cNvPr id="5" name="Image 0" descr="/tmp/pcwork/api-patterns-and-practices-graphql/presentation/_shared/assets/redhat-logo-white.png">    </p:cNvPr>
+          <p:cNvPr id="5" name="Image 0" descr="/work/_shared/assets/redhat-logo-white.png">    </p:cNvPr>
           <p:cNvPicPr>
             <a:picLocks noChangeAspect="1"/>
           </p:cNvPicPr>
@@ -14295,7 +14295,7 @@
       </p:sp>
       <p:pic>
         <p:nvPicPr>
-          <p:cNvPr id="3" name="Image 0" descr="/tmp/pcwork/api-patterns-and-practices-graphql/presentation/_shared/assets/logo-candidate-2.png">    </p:cNvPr>
+          <p:cNvPr id="3" name="Image 0" descr="/work/_shared/assets/logo-candidate-2.png">    </p:cNvPr>
           <p:cNvPicPr>
             <a:picLocks noChangeAspect="1"/>
           </p:cNvPicPr>
@@ -14895,7 +14895,7 @@
       </p:sp>
       <p:pic>
         <p:nvPicPr>
-          <p:cNvPr id="3" name="Image 0" descr="/tmp/pcwork/api-patterns-and-practices-graphql/presentation/_shared/assets/logo-candidate-2.png">    </p:cNvPr>
+          <p:cNvPr id="3" name="Image 0" descr="/work/_shared/assets/logo-candidate-2.png">    </p:cNvPr>
           <p:cNvPicPr>
             <a:picLocks noChangeAspect="1"/>
           </p:cNvPicPr>
@@ -15513,7 +15513,7 @@
       </p:sp>
       <p:pic>
         <p:nvPicPr>
-          <p:cNvPr id="3" name="Image 0" descr="/tmp/pcwork/api-patterns-and-practices-graphql/presentation/_shared/assets/logo-candidate-2.png">    </p:cNvPr>
+          <p:cNvPr id="3" name="Image 0" descr="/work/_shared/assets/logo-candidate-2.png">    </p:cNvPr>
           <p:cNvPicPr>
             <a:picLocks noChangeAspect="1"/>
           </p:cNvPicPr>
@@ -16005,7 +16005,7 @@
       </p:sp>
       <p:pic>
         <p:nvPicPr>
-          <p:cNvPr id="3" name="Image 0" descr="/tmp/pcwork/api-patterns-and-practices-graphql/presentation/_shared/assets/logo-candidate-2.png">    </p:cNvPr>
+          <p:cNvPr id="3" name="Image 0" descr="/work/_shared/assets/logo-candidate-2.png">    </p:cNvPr>
           <p:cNvPicPr>
             <a:picLocks noChangeAspect="1"/>
           </p:cNvPicPr>
@@ -16107,7 +16107,7 @@
       </p:sp>
       <p:pic>
         <p:nvPicPr>
-          <p:cNvPr id="6" name="Image 1" descr="/tmp/pcwork/api-patterns-and-practices-graphql/presentation/_shared/png/11-deprecation-lifecycle.png">    </p:cNvPr>
+          <p:cNvPr id="6" name="Image 1" descr="/work/_shared/png/11-deprecation-lifecycle.png">    </p:cNvPr>
           <p:cNvPicPr>
             <a:picLocks noChangeAspect="1"/>
           </p:cNvPicPr>
@@ -16161,7 +16161,7 @@
                 <a:ea typeface="Red Hat Text" pitchFamily="34" charset="-122"/>
                 <a:cs typeface="Red Hat Text" pitchFamily="34" charset="-120"/>
               </a:rPr>
-              <a:t>Figure 11.2 — Each step has a gate result, and removal is a decision, not a side effect.</a:t>
+              <a:t>Figure 11.2: Each step has a gate result, and removal is a decision, not a side effect.</a:t>
             </a:r>
             <a:endParaRPr lang="en-US" sz="1300" dirty="0"/>
           </a:p>
@@ -16311,7 +16311,7 @@
       </p:sp>
       <p:pic>
         <p:nvPicPr>
-          <p:cNvPr id="5" name="Image 0" descr="/tmp/pcwork/api-patterns-and-practices-graphql/presentation/_shared/assets/redhat-logo-white.png">    </p:cNvPr>
+          <p:cNvPr id="5" name="Image 0" descr="/work/_shared/assets/redhat-logo-white.png">    </p:cNvPr>
           <p:cNvPicPr>
             <a:picLocks noChangeAspect="1"/>
           </p:cNvPicPr>
@@ -16399,7 +16399,7 @@
       </p:sp>
       <p:pic>
         <p:nvPicPr>
-          <p:cNvPr id="3" name="Image 0" descr="/tmp/pcwork/api-patterns-and-practices-graphql/presentation/_shared/assets/logo-candidate-2.png">    </p:cNvPr>
+          <p:cNvPr id="3" name="Image 0" descr="/work/_shared/assets/logo-candidate-2.png">    </p:cNvPr>
           <p:cNvPicPr>
             <a:picLocks noChangeAspect="1"/>
           </p:cNvPicPr>
@@ -16746,7 +16746,7 @@
       </p:sp>
       <p:pic>
         <p:nvPicPr>
-          <p:cNvPr id="3" name="Image 0" descr="/tmp/pcwork/api-patterns-and-practices-graphql/presentation/_shared/assets/logo-candidate-2.png">    </p:cNvPr>
+          <p:cNvPr id="3" name="Image 0" descr="/work/_shared/assets/logo-candidate-2.png">    </p:cNvPr>
           <p:cNvPicPr>
             <a:picLocks noChangeAspect="1"/>
           </p:cNvPicPr>
@@ -17238,7 +17238,7 @@
       </p:sp>
       <p:pic>
         <p:nvPicPr>
-          <p:cNvPr id="3" name="Image 0" descr="/tmp/pcwork/api-patterns-and-practices-graphql/presentation/_shared/assets/logo-candidate-2.png">    </p:cNvPr>
+          <p:cNvPr id="3" name="Image 0" descr="/work/_shared/assets/logo-candidate-2.png">    </p:cNvPr>
           <p:cNvPicPr>
             <a:picLocks noChangeAspect="1"/>
           </p:cNvPicPr>
@@ -17784,7 +17784,7 @@
       </p:sp>
       <p:pic>
         <p:nvPicPr>
-          <p:cNvPr id="3" name="Image 0" descr="/tmp/pcwork/api-patterns-and-practices-graphql/presentation/_shared/assets/logo-candidate-2.png">    </p:cNvPr>
+          <p:cNvPr id="3" name="Image 0" descr="/work/_shared/assets/logo-candidate-2.png">    </p:cNvPr>
           <p:cNvPicPr>
             <a:picLocks noChangeAspect="1"/>
           </p:cNvPicPr>
@@ -17886,7 +17886,7 @@
       </p:sp>
       <p:pic>
         <p:nvPicPr>
-          <p:cNvPr id="6" name="Image 1" descr="/tmp/pcwork/api-patterns-and-practices-graphql/presentation/_shared/png/13-per-field-vs-per-key.png">    </p:cNvPr>
+          <p:cNvPr id="6" name="Image 1" descr="/work/_shared/png/13-per-field-vs-per-key.png">    </p:cNvPr>
           <p:cNvPicPr>
             <a:picLocks noChangeAspect="1"/>
           </p:cNvPicPr>
@@ -17940,7 +17940,7 @@
                 <a:ea typeface="Red Hat Text" pitchFamily="34" charset="-122"/>
                 <a:cs typeface="Red Hat Text" pitchFamily="34" charset="-120"/>
               </a:rPr>
-              <a:t>Figure 13.4 — SmallRye keys a loader by parent per field; Strawberry keys one per kind of key.</a:t>
+              <a:t>Figure 13.4: SmallRye keys a loader by parent per field; Strawberry keys one per kind of key.</a:t>
             </a:r>
             <a:endParaRPr lang="en-US" sz="1300" dirty="0"/>
           </a:p>
@@ -18012,7 +18012,7 @@
       </p:sp>
       <p:pic>
         <p:nvPicPr>
-          <p:cNvPr id="3" name="Image 0" descr="/tmp/pcwork/api-patterns-and-practices-graphql/presentation/_shared/assets/logo-candidate-2.png">    </p:cNvPr>
+          <p:cNvPr id="3" name="Image 0" descr="/work/_shared/assets/logo-candidate-2.png">    </p:cNvPr>
           <p:cNvPicPr>
             <a:picLocks noChangeAspect="1"/>
           </p:cNvPicPr>
@@ -18582,7 +18582,7 @@
       </p:sp>
       <p:pic>
         <p:nvPicPr>
-          <p:cNvPr id="5" name="Image 0" descr="/tmp/pcwork/api-patterns-and-practices-graphql/presentation/_shared/assets/redhat-logo-white.png">    </p:cNvPr>
+          <p:cNvPr id="5" name="Image 0" descr="/work/_shared/assets/redhat-logo-white.png">    </p:cNvPr>
           <p:cNvPicPr>
             <a:picLocks noChangeAspect="1"/>
           </p:cNvPicPr>
@@ -18670,7 +18670,7 @@
       </p:sp>
       <p:pic>
         <p:nvPicPr>
-          <p:cNvPr id="3" name="Image 0" descr="/tmp/pcwork/api-patterns-and-practices-graphql/presentation/_shared/assets/logo-candidate-2.png">    </p:cNvPr>
+          <p:cNvPr id="3" name="Image 0" descr="/work/_shared/assets/logo-candidate-2.png">    </p:cNvPr>
           <p:cNvPicPr>
             <a:picLocks noChangeAspect="1"/>
           </p:cNvPicPr>
@@ -18772,7 +18772,7 @@
       </p:sp>
       <p:pic>
         <p:nvPicPr>
-          <p:cNvPr id="6" name="Image 1" descr="/tmp/pcwork/api-patterns-and-practices-graphql/presentation/_shared/png/14-limit-pipeline.png">    </p:cNvPr>
+          <p:cNvPr id="6" name="Image 1" descr="/work/_shared/png/14-limit-pipeline.png">    </p:cNvPr>
           <p:cNvPicPr>
             <a:picLocks noChangeAspect="1"/>
           </p:cNvPicPr>
@@ -18826,7 +18826,7 @@
                 <a:ea typeface="Red Hat Text" pitchFamily="34" charset="-122"/>
                 <a:cs typeface="Red Hat Text" pitchFamily="34" charset="-120"/>
               </a:rPr>
-              <a:t>Figure 14.2 — Every refusal ends before the sources are reached.</a:t>
+              <a:t>Figure 14.2: Every refusal ends before the sources are reached.</a:t>
             </a:r>
             <a:endParaRPr lang="en-US" sz="1300" dirty="0"/>
           </a:p>
@@ -18898,7 +18898,7 @@
       </p:sp>
       <p:pic>
         <p:nvPicPr>
-          <p:cNvPr id="3" name="Image 0" descr="/tmp/pcwork/api-patterns-and-practices-graphql/presentation/_shared/assets/logo-candidate-2.png">    </p:cNvPr>
+          <p:cNvPr id="3" name="Image 0" descr="/work/_shared/assets/logo-candidate-2.png">    </p:cNvPr>
           <p:cNvPicPr>
             <a:picLocks noChangeAspect="1"/>
           </p:cNvPicPr>
@@ -19552,7 +19552,7 @@
       </p:sp>
       <p:pic>
         <p:nvPicPr>
-          <p:cNvPr id="3" name="Image 0" descr="/tmp/pcwork/api-patterns-and-practices-graphql/presentation/_shared/assets/logo-candidate-2.png">    </p:cNvPr>
+          <p:cNvPr id="3" name="Image 0" descr="/work/_shared/assets/logo-candidate-2.png">    </p:cNvPr>
           <p:cNvPicPr>
             <a:picLocks noChangeAspect="1"/>
           </p:cNvPicPr>
@@ -19654,7 +19654,7 @@
       </p:sp>
       <p:pic>
         <p:nvPicPr>
-          <p:cNvPr id="6" name="Image 1" descr="/tmp/pcwork/api-patterns-and-practices-graphql/presentation/_shared/png/15-persisted-document-seam.png">    </p:cNvPr>
+          <p:cNvPr id="6" name="Image 1" descr="/work/_shared/png/15-persisted-document-seam.png">    </p:cNvPr>
           <p:cNvPicPr>
             <a:picLocks noChangeAspect="1"/>
           </p:cNvPicPr>
@@ -19708,7 +19708,7 @@
                 <a:ea typeface="Red Hat Text" pitchFamily="34" charset="-122"/>
                 <a:cs typeface="Red Hat Text" pitchFamily="34" charset="-120"/>
               </a:rPr>
-              <a:t>Figure 15.3 — A route ahead of SmallRye on Quarkus; an extension inside Strawberry on Python.</a:t>
+              <a:t>Figure 15.3: A route ahead of SmallRye on Quarkus; an extension inside Strawberry on Python.</a:t>
             </a:r>
             <a:endParaRPr lang="en-US" sz="1300" dirty="0"/>
           </a:p>
@@ -19780,7 +19780,7 @@
       </p:sp>
       <p:pic>
         <p:nvPicPr>
-          <p:cNvPr id="3" name="Image 0" descr="/tmp/pcwork/api-patterns-and-practices-graphql/presentation/_shared/assets/logo-candidate-2.png">    </p:cNvPr>
+          <p:cNvPr id="3" name="Image 0" descr="/work/_shared/assets/logo-candidate-2.png">    </p:cNvPr>
           <p:cNvPicPr>
             <a:picLocks noChangeAspect="1"/>
           </p:cNvPicPr>
@@ -20506,7 +20506,7 @@
       </p:sp>
       <p:pic>
         <p:nvPicPr>
-          <p:cNvPr id="3" name="Image 0" descr="/tmp/pcwork/api-patterns-and-practices-graphql/presentation/_shared/assets/logo-candidate-2.png">    </p:cNvPr>
+          <p:cNvPr id="3" name="Image 0" descr="/work/_shared/assets/logo-candidate-2.png">    </p:cNvPr>
           <p:cNvPicPr>
             <a:picLocks noChangeAspect="1"/>
           </p:cNvPicPr>
@@ -21166,7 +21166,7 @@
       </p:sp>
       <p:pic>
         <p:nvPicPr>
-          <p:cNvPr id="5" name="Image 0" descr="/tmp/pcwork/api-patterns-and-practices-graphql/presentation/_shared/assets/redhat-logo-white.png">    </p:cNvPr>
+          <p:cNvPr id="5" name="Image 0" descr="/work/_shared/assets/redhat-logo-white.png">    </p:cNvPr>
           <p:cNvPicPr>
             <a:picLocks noChangeAspect="1"/>
           </p:cNvPicPr>
@@ -21332,7 +21332,7 @@
       </p:sp>
       <p:pic>
         <p:nvPicPr>
-          <p:cNvPr id="5" name="Image 0" descr="/tmp/pcwork/api-patterns-and-practices-graphql/presentation/_shared/assets/redhat-logo-white.png">    </p:cNvPr>
+          <p:cNvPr id="5" name="Image 0" descr="/work/_shared/assets/redhat-logo-white.png">    </p:cNvPr>
           <p:cNvPicPr>
             <a:picLocks noChangeAspect="1"/>
           </p:cNvPicPr>
@@ -21420,7 +21420,7 @@
       </p:sp>
       <p:pic>
         <p:nvPicPr>
-          <p:cNvPr id="3" name="Image 0" descr="/tmp/pcwork/api-patterns-and-practices-graphql/presentation/_shared/assets/logo-candidate-2.png">    </p:cNvPr>
+          <p:cNvPr id="3" name="Image 0" descr="/work/_shared/assets/logo-candidate-2.png">    </p:cNvPr>
           <p:cNvPicPr>
             <a:picLocks noChangeAspect="1"/>
           </p:cNvPicPr>
@@ -21948,7 +21948,7 @@
       </p:sp>
       <p:pic>
         <p:nvPicPr>
-          <p:cNvPr id="3" name="Image 0" descr="/tmp/pcwork/api-patterns-and-practices-graphql/presentation/_shared/assets/logo-candidate-2.png">    </p:cNvPr>
+          <p:cNvPr id="3" name="Image 0" descr="/work/_shared/assets/logo-candidate-2.png">    </p:cNvPr>
           <p:cNvPicPr>
             <a:picLocks noChangeAspect="1"/>
           </p:cNvPicPr>
@@ -22638,7 +22638,7 @@
       </p:sp>
       <p:pic>
         <p:nvPicPr>
-          <p:cNvPr id="3" name="Image 0" descr="/tmp/pcwork/api-patterns-and-practices-graphql/presentation/_shared/assets/logo-candidate-2.png">    </p:cNvPr>
+          <p:cNvPr id="3" name="Image 0" descr="/work/_shared/assets/logo-candidate-2.png">    </p:cNvPr>
           <p:cNvPicPr>
             <a:picLocks noChangeAspect="1"/>
           </p:cNvPicPr>
@@ -23076,7 +23076,7 @@
       </p:sp>
       <p:pic>
         <p:nvPicPr>
-          <p:cNvPr id="3" name="Image 0" descr="/tmp/pcwork/api-patterns-and-practices-graphql/presentation/_shared/assets/logo-candidate-2.png">    </p:cNvPr>
+          <p:cNvPr id="3" name="Image 0" descr="/work/_shared/assets/logo-candidate-2.png">    </p:cNvPr>
           <p:cNvPicPr>
             <a:picLocks noChangeAspect="1"/>
           </p:cNvPicPr>
@@ -23676,7 +23676,7 @@
       </p:sp>
       <p:pic>
         <p:nvPicPr>
-          <p:cNvPr id="3" name="Image 0" descr="/tmp/pcwork/api-patterns-and-practices-graphql/presentation/_shared/assets/logo-candidate-2.png">    </p:cNvPr>
+          <p:cNvPr id="3" name="Image 0" descr="/work/_shared/assets/logo-candidate-2.png">    </p:cNvPr>
           <p:cNvPicPr>
             <a:picLocks noChangeAspect="1"/>
           </p:cNvPicPr>
@@ -24498,7 +24498,7 @@
       </p:sp>
       <p:pic>
         <p:nvPicPr>
-          <p:cNvPr id="5" name="Image 0" descr="/tmp/pcwork/api-patterns-and-practices-graphql/presentation/_shared/assets/redhat-logo-white.png">    </p:cNvPr>
+          <p:cNvPr id="5" name="Image 0" descr="/work/_shared/assets/redhat-logo-white.png">    </p:cNvPr>
           <p:cNvPicPr>
             <a:picLocks noChangeAspect="1"/>
           </p:cNvPicPr>
@@ -24586,7 +24586,7 @@
       </p:sp>
       <p:pic>
         <p:nvPicPr>
-          <p:cNvPr id="3" name="Image 0" descr="/tmp/pcwork/api-patterns-and-practices-graphql/presentation/_shared/assets/logo-candidate-2.png">    </p:cNvPr>
+          <p:cNvPr id="3" name="Image 0" descr="/work/_shared/assets/logo-candidate-2.png">    </p:cNvPr>
           <p:cNvPicPr>
             <a:picLocks noChangeAspect="1"/>
           </p:cNvPicPr>
@@ -24688,7 +24688,7 @@
       </p:sp>
       <p:pic>
         <p:nvPicPr>
-          <p:cNvPr id="6" name="Image 1" descr="/tmp/pcwork/api-patterns-and-practices-graphql/presentation/_shared/png/19-telemetry-pipeline.png">    </p:cNvPr>
+          <p:cNvPr id="6" name="Image 1" descr="/work/_shared/png/19-telemetry-pipeline.png">    </p:cNvPr>
           <p:cNvPicPr>
             <a:picLocks noChangeAspect="1"/>
           </p:cNvPicPr>
@@ -24742,7 +24742,7 @@
                 <a:ea typeface="Red Hat Text" pitchFamily="34" charset="-122"/>
                 <a:cs typeface="Red Hat Text" pitchFamily="34" charset="-120"/>
               </a:rPr>
-              <a:t>Figure 19.2 — Traces, metrics and logs leave over OTLP to one collector.</a:t>
+              <a:t>Figure 19.2: Traces, metrics and logs leave over OTLP to one collector.</a:t>
             </a:r>
             <a:endParaRPr lang="en-US" sz="1300" dirty="0"/>
           </a:p>
@@ -24814,7 +24814,7 @@
       </p:sp>
       <p:pic>
         <p:nvPicPr>
-          <p:cNvPr id="3" name="Image 0" descr="/tmp/pcwork/api-patterns-and-practices-graphql/presentation/_shared/assets/logo-candidate-2.png">    </p:cNvPr>
+          <p:cNvPr id="3" name="Image 0" descr="/work/_shared/assets/logo-candidate-2.png">    </p:cNvPr>
           <p:cNvPicPr>
             <a:picLocks noChangeAspect="1"/>
           </p:cNvPicPr>
@@ -25396,7 +25396,7 @@
       </p:sp>
       <p:pic>
         <p:nvPicPr>
-          <p:cNvPr id="3" name="Image 0" descr="/tmp/pcwork/api-patterns-and-practices-graphql/presentation/_shared/assets/logo-candidate-2.png">    </p:cNvPr>
+          <p:cNvPr id="3" name="Image 0" descr="/work/_shared/assets/logo-candidate-2.png">    </p:cNvPr>
           <p:cNvPicPr>
             <a:picLocks noChangeAspect="1"/>
           </p:cNvPicPr>
@@ -26122,7 +26122,7 @@
       </p:sp>
       <p:pic>
         <p:nvPicPr>
-          <p:cNvPr id="3" name="Image 0" descr="/tmp/pcwork/api-patterns-and-practices-graphql/presentation/_shared/assets/logo-candidate-2.png">    </p:cNvPr>
+          <p:cNvPr id="3" name="Image 0" descr="/work/_shared/assets/logo-candidate-2.png">    </p:cNvPr>
           <p:cNvPicPr>
             <a:picLocks noChangeAspect="1"/>
           </p:cNvPicPr>
@@ -26224,7 +26224,7 @@
       </p:sp>
       <p:pic>
         <p:nvPicPr>
-          <p:cNvPr id="6" name="Image 1" descr="/tmp/pcwork/api-patterns-and-practices-graphql/presentation/_shared/png/00-lab-topology.png">    </p:cNvPr>
+          <p:cNvPr id="6" name="Image 1" descr="/work/_shared/png/00-lab-topology.png">    </p:cNvPr>
           <p:cNvPicPr>
             <a:picLocks noChangeAspect="1"/>
           </p:cNvPicPr>
@@ -26278,7 +26278,7 @@
                 <a:ea typeface="Red Hat Text" pitchFamily="34" charset="-122"/>
                 <a:cs typeface="Red Hat Text" pitchFamily="34" charset="-120"/>
               </a:rPr>
-              <a:t>Figure 0.1 — verify.sh drives both stacks; graphql-inspector diffs each live schema against the canonical SDL.</a:t>
+              <a:t>Figure 0.1: verify.sh drives both stacks; graphql-inspector diffs each live schema against the canonical SDL.</a:t>
             </a:r>
             <a:endParaRPr lang="en-US" sz="1300" dirty="0"/>
           </a:p>
@@ -26350,7 +26350,7 @@
       </p:sp>
       <p:pic>
         <p:nvPicPr>
-          <p:cNvPr id="3" name="Image 0" descr="/tmp/pcwork/api-patterns-and-practices-graphql/presentation/_shared/assets/logo-candidate-2.png">    </p:cNvPr>
+          <p:cNvPr id="3" name="Image 0" descr="/work/_shared/assets/logo-candidate-2.png">    </p:cNvPr>
           <p:cNvPicPr>
             <a:picLocks noChangeAspect="1"/>
           </p:cNvPicPr>
@@ -26896,7 +26896,7 @@
       </p:sp>
       <p:pic>
         <p:nvPicPr>
-          <p:cNvPr id="3" name="Image 0" descr="/tmp/pcwork/api-patterns-and-practices-graphql/presentation/_shared/assets/logo-candidate-2.png">    </p:cNvPr>
+          <p:cNvPr id="3" name="Image 0" descr="/work/_shared/assets/logo-candidate-2.png">    </p:cNvPr>
           <p:cNvPicPr>
             <a:picLocks noChangeAspect="1"/>
           </p:cNvPicPr>
@@ -26998,7 +26998,7 @@
       </p:sp>
       <p:pic>
         <p:nvPicPr>
-          <p:cNvPr id="6" name="Image 1" descr="/tmp/pcwork/api-patterns-and-practices-graphql/presentation/_shared/png/20-cross-stack-topology.png">    </p:cNvPr>
+          <p:cNvPr id="6" name="Image 1" descr="/work/_shared/png/20-cross-stack-topology.png">    </p:cNvPr>
           <p:cNvPicPr>
             <a:picLocks noChangeAspect="1"/>
           </p:cNvPicPr>
@@ -27052,7 +27052,7 @@
                 <a:ea typeface="Red Hat Text" pitchFamily="34" charset="-122"/>
                 <a:cs typeface="Red Hat Text" pitchFamily="34" charset="-120"/>
               </a:rPr>
-              <a:t>Figure 20.5 — Either stack can own either subgraph; the supergraph does not know which.</a:t>
+              <a:t>Figure 20.5: Either stack can own either subgraph; the supergraph does not know which.</a:t>
             </a:r>
             <a:endParaRPr lang="en-US" sz="1300" dirty="0"/>
           </a:p>
@@ -27202,7 +27202,7 @@
       </p:sp>
       <p:pic>
         <p:nvPicPr>
-          <p:cNvPr id="5" name="Image 0" descr="/tmp/pcwork/api-patterns-and-practices-graphql/presentation/_shared/assets/redhat-logo-white.png">    </p:cNvPr>
+          <p:cNvPr id="5" name="Image 0" descr="/work/_shared/assets/redhat-logo-white.png">    </p:cNvPr>
           <p:cNvPicPr>
             <a:picLocks noChangeAspect="1"/>
           </p:cNvPicPr>
@@ -27290,7 +27290,7 @@
       </p:sp>
       <p:pic>
         <p:nvPicPr>
-          <p:cNvPr id="3" name="Image 0" descr="/tmp/pcwork/api-patterns-and-practices-graphql/presentation/_shared/assets/logo-candidate-2.png">    </p:cNvPr>
+          <p:cNvPr id="3" name="Image 0" descr="/work/_shared/assets/logo-candidate-2.png">    </p:cNvPr>
           <p:cNvPicPr>
             <a:picLocks noChangeAspect="1"/>
           </p:cNvPicPr>
@@ -27728,7 +27728,7 @@
       </p:sp>
       <p:pic>
         <p:nvPicPr>
-          <p:cNvPr id="3" name="Image 0" descr="/tmp/pcwork/api-patterns-and-practices-graphql/presentation/_shared/assets/logo-candidate-2.png">    </p:cNvPr>
+          <p:cNvPr id="3" name="Image 0" descr="/work/_shared/assets/logo-candidate-2.png">    </p:cNvPr>
           <p:cNvPicPr>
             <a:picLocks noChangeAspect="1"/>
           </p:cNvPicPr>
@@ -28436,7 +28436,7 @@
       </p:sp>
       <p:pic>
         <p:nvPicPr>
-          <p:cNvPr id="3" name="Image 0" descr="/tmp/pcwork/api-patterns-and-practices-graphql/presentation/_shared/assets/logo-candidate-2.png">    </p:cNvPr>
+          <p:cNvPr id="3" name="Image 0" descr="/work/_shared/assets/logo-candidate-2.png">    </p:cNvPr>
           <p:cNvPicPr>
             <a:picLocks noChangeAspect="1"/>
           </p:cNvPicPr>
@@ -29150,7 +29150,7 @@
       </p:sp>
       <p:pic>
         <p:nvPicPr>
-          <p:cNvPr id="5" name="Image 0" descr="/tmp/pcwork/api-patterns-and-practices-graphql/presentation/_shared/assets/redhat-logo-white.png">    </p:cNvPr>
+          <p:cNvPr id="5" name="Image 0" descr="/work/_shared/assets/redhat-logo-white.png">    </p:cNvPr>
           <p:cNvPicPr>
             <a:picLocks noChangeAspect="1"/>
           </p:cNvPicPr>
@@ -29238,7 +29238,7 @@
       </p:sp>
       <p:pic>
         <p:nvPicPr>
-          <p:cNvPr id="3" name="Image 0" descr="/tmp/pcwork/api-patterns-and-practices-graphql/presentation/_shared/assets/logo-candidate-2.png">    </p:cNvPr>
+          <p:cNvPr id="3" name="Image 0" descr="/work/_shared/assets/logo-candidate-2.png">    </p:cNvPr>
           <p:cNvPicPr>
             <a:picLocks noChangeAspect="1"/>
           </p:cNvPicPr>
@@ -29340,7 +29340,7 @@
       </p:sp>
       <p:pic>
         <p:nvPicPr>
-          <p:cNvPr id="6" name="Image 1" descr="/tmp/pcwork/api-patterns-and-practices-graphql/presentation/_shared/png/23-test-layers.png">    </p:cNvPr>
+          <p:cNvPr id="6" name="Image 1" descr="/work/_shared/png/23-test-layers.png">    </p:cNvPr>
           <p:cNvPicPr>
             <a:picLocks noChangeAspect="1"/>
           </p:cNvPicPr>
@@ -29394,7 +29394,7 @@
                 <a:ea typeface="Red Hat Text" pitchFamily="34" charset="-122"/>
                 <a:cs typeface="Red Hat Text" pitchFamily="34" charset="-120"/>
               </a:rPr>
-              <a:t>Figure 23.1 — Three layers run in each stack's test image; three run against the live stacks.</a:t>
+              <a:t>Figure 23.1: Three layers run in each stack's test image; three run against the live stacks.</a:t>
             </a:r>
             <a:endParaRPr lang="en-US" sz="1300" dirty="0"/>
           </a:p>
@@ -29466,7 +29466,7 @@
       </p:sp>
       <p:pic>
         <p:nvPicPr>
-          <p:cNvPr id="3" name="Image 0" descr="/tmp/pcwork/api-patterns-and-practices-graphql/presentation/_shared/assets/logo-candidate-2.png">    </p:cNvPr>
+          <p:cNvPr id="3" name="Image 0" descr="/work/_shared/assets/logo-candidate-2.png">    </p:cNvPr>
           <p:cNvPicPr>
             <a:picLocks noChangeAspect="1"/>
           </p:cNvPicPr>
@@ -30030,7 +30030,7 @@
       </p:sp>
       <p:pic>
         <p:nvPicPr>
-          <p:cNvPr id="3" name="Image 0" descr="/tmp/pcwork/api-patterns-and-practices-graphql/presentation/_shared/assets/logo-candidate-2.png">    </p:cNvPr>
+          <p:cNvPr id="3" name="Image 0" descr="/work/_shared/assets/logo-candidate-2.png">    </p:cNvPr>
           <p:cNvPicPr>
             <a:picLocks noChangeAspect="1"/>
           </p:cNvPicPr>
@@ -30132,7 +30132,7 @@
       </p:sp>
       <p:pic>
         <p:nvPicPr>
-          <p:cNvPr id="6" name="Image 1" descr="/tmp/pcwork/api-patterns-and-practices-graphql/presentation/_shared/png/24-dev-vs-prod-surfaces.png">    </p:cNvPr>
+          <p:cNvPr id="6" name="Image 1" descr="/work/_shared/png/24-dev-vs-prod-surfaces.png">    </p:cNvPr>
           <p:cNvPicPr>
             <a:picLocks noChangeAspect="1"/>
           </p:cNvPicPr>
@@ -30186,7 +30186,7 @@
                 <a:ea typeface="Red Hat Text" pitchFamily="34" charset="-122"/>
                 <a:cs typeface="Red Hat Text" pitchFamily="34" charset="-120"/>
               </a:rPr>
-              <a:t>Figure 24.2 — The IDE and Dev UI stay on development instances; masking and trace ids do not change.</a:t>
+              <a:t>Figure 24.2: The IDE and Dev UI stay on development instances; masking and trace ids do not change.</a:t>
             </a:r>
             <a:endParaRPr lang="en-US" sz="1300" dirty="0"/>
           </a:p>
@@ -30258,7 +30258,7 @@
       </p:sp>
       <p:pic>
         <p:nvPicPr>
-          <p:cNvPr id="3" name="Image 0" descr="/tmp/pcwork/api-patterns-and-practices-graphql/presentation/_shared/assets/logo-candidate-2.png">    </p:cNvPr>
+          <p:cNvPr id="3" name="Image 0" descr="/work/_shared/assets/logo-candidate-2.png">    </p:cNvPr>
           <p:cNvPicPr>
             <a:picLocks noChangeAspect="1"/>
           </p:cNvPicPr>
@@ -31008,7 +31008,7 @@
       </p:sp>
       <p:pic>
         <p:nvPicPr>
-          <p:cNvPr id="5" name="Image 0" descr="/tmp/pcwork/api-patterns-and-practices-graphql/presentation/_shared/assets/redhat-logo-white.png">    </p:cNvPr>
+          <p:cNvPr id="5" name="Image 0" descr="/work/_shared/assets/redhat-logo-white.png">    </p:cNvPr>
           <p:cNvPicPr>
             <a:picLocks noChangeAspect="1"/>
           </p:cNvPicPr>
@@ -31096,7 +31096,7 @@
       </p:sp>
       <p:pic>
         <p:nvPicPr>
-          <p:cNvPr id="3" name="Image 0" descr="/tmp/pcwork/api-patterns-and-practices-graphql/presentation/_shared/assets/logo-candidate-2.png">    </p:cNvPr>
+          <p:cNvPr id="3" name="Image 0" descr="/work/_shared/assets/logo-candidate-2.png">    </p:cNvPr>
           <p:cNvPicPr>
             <a:picLocks noChangeAspect="1"/>
           </p:cNvPicPr>
@@ -31858,7 +31858,7 @@
       </p:sp>
       <p:pic>
         <p:nvPicPr>
-          <p:cNvPr id="3" name="Image 0" descr="/tmp/pcwork/api-patterns-and-practices-graphql/presentation/_shared/assets/logo-candidate-2.png">    </p:cNvPr>
+          <p:cNvPr id="3" name="Image 0" descr="/work/_shared/assets/logo-candidate-2.png">    </p:cNvPr>
           <p:cNvPicPr>
             <a:picLocks noChangeAspect="1"/>
           </p:cNvPicPr>
@@ -31960,7 +31960,7 @@
       </p:sp>
       <p:pic>
         <p:nvPicPr>
-          <p:cNvPr id="6" name="Image 1" descr="/tmp/pcwork/api-patterns-and-practices-graphql/presentation/_shared/png/25-compose-tier-topology.png">    </p:cNvPr>
+          <p:cNvPr id="6" name="Image 1" descr="/work/_shared/png/25-compose-tier-topology.png">    </p:cNvPr>
           <p:cNvPicPr>
             <a:picLocks noChangeAspect="1"/>
           </p:cNvPicPr>
@@ -32014,7 +32014,7 @@
                 <a:ea typeface="Red Hat Text" pitchFamily="34" charset="-122"/>
                 <a:cs typeface="Red Hat Text" pitchFamily="34" charset="-120"/>
               </a:rPr>
-              <a:t>Figure 25.1 — The backend network is internal; the stacks are reached only through the edge.</a:t>
+              <a:t>Figure 25.1: The backend network is internal; the stacks are reached only through the edge.</a:t>
             </a:r>
             <a:endParaRPr lang="en-US" sz="1300" dirty="0"/>
           </a:p>
@@ -32086,7 +32086,7 @@
       </p:sp>
       <p:pic>
         <p:nvPicPr>
-          <p:cNvPr id="3" name="Image 0" descr="/tmp/pcwork/api-patterns-and-practices-graphql/presentation/_shared/assets/logo-candidate-2.png">    </p:cNvPr>
+          <p:cNvPr id="3" name="Image 0" descr="/work/_shared/assets/logo-candidate-2.png">    </p:cNvPr>
           <p:cNvPicPr>
             <a:picLocks noChangeAspect="1"/>
           </p:cNvPicPr>
@@ -32830,7 +32830,7 @@
       </p:sp>
       <p:pic>
         <p:nvPicPr>
-          <p:cNvPr id="3" name="Image 0" descr="/tmp/pcwork/api-patterns-and-practices-graphql/presentation/_shared/assets/logo-candidate-2.png">    </p:cNvPr>
+          <p:cNvPr id="3" name="Image 0" descr="/work/_shared/assets/logo-candidate-2.png">    </p:cNvPr>
           <p:cNvPicPr>
             <a:picLocks noChangeAspect="1"/>
           </p:cNvPicPr>
@@ -33153,7 +33153,7 @@
       </p:sp>
       <p:pic>
         <p:nvPicPr>
-          <p:cNvPr id="3" name="Image 0" descr="/tmp/pcwork/api-patterns-and-practices-graphql/presentation/_shared/assets/logo-candidate-2.png">    </p:cNvPr>
+          <p:cNvPr id="3" name="Image 0" descr="/work/_shared/assets/logo-candidate-2.png">    </p:cNvPr>
           <p:cNvPicPr>
             <a:picLocks noChangeAspect="1"/>
           </p:cNvPicPr>
@@ -33530,7 +33530,7 @@
       </p:sp>
       <p:pic>
         <p:nvPicPr>
-          <p:cNvPr id="5" name="Image 0" descr="/tmp/pcwork/api-patterns-and-practices-graphql/presentation/_shared/assets/redhat-logo-white.png">    </p:cNvPr>
+          <p:cNvPr id="5" name="Image 0" descr="/work/_shared/assets/redhat-logo-white.png">    </p:cNvPr>
           <p:cNvPicPr>
             <a:picLocks noChangeAspect="1"/>
           </p:cNvPicPr>
@@ -33618,7 +33618,7 @@
       </p:sp>
       <p:pic>
         <p:nvPicPr>
-          <p:cNvPr id="3" name="Image 0" descr="/tmp/pcwork/api-patterns-and-practices-graphql/presentation/_shared/assets/logo-candidate-2.png">    </p:cNvPr>
+          <p:cNvPr id="3" name="Image 0" descr="/work/_shared/assets/logo-candidate-2.png">    </p:cNvPr>
           <p:cNvPicPr>
             <a:picLocks noChangeAspect="1"/>
           </p:cNvPicPr>
@@ -34326,7 +34326,7 @@
       </p:sp>
       <p:pic>
         <p:nvPicPr>
-          <p:cNvPr id="3" name="Image 0" descr="/tmp/pcwork/api-patterns-and-practices-graphql/presentation/_shared/assets/logo-candidate-2.png">    </p:cNvPr>
+          <p:cNvPr id="3" name="Image 0" descr="/work/_shared/assets/logo-candidate-2.png">    </p:cNvPr>
           <p:cNvPicPr>
             <a:picLocks noChangeAspect="1"/>
           </p:cNvPicPr>
@@ -35088,7 +35088,7 @@
       </p:sp>
       <p:pic>
         <p:nvPicPr>
-          <p:cNvPr id="3" name="Image 0" descr="/tmp/pcwork/api-patterns-and-practices-graphql/presentation/_shared/assets/logo-candidate-2.png">    </p:cNvPr>
+          <p:cNvPr id="3" name="Image 0" descr="/work/_shared/assets/logo-candidate-2.png">    </p:cNvPr>
           <p:cNvPicPr>
             <a:picLocks noChangeAspect="1"/>
           </p:cNvPicPr>
@@ -35850,7 +35850,7 @@
       </p:sp>
       <p:pic>
         <p:nvPicPr>
-          <p:cNvPr id="3" name="Image 0" descr="/tmp/pcwork/api-patterns-and-practices-graphql/presentation/_shared/assets/logo-candidate-2.png">    </p:cNvPr>
+          <p:cNvPr id="3" name="Image 0" descr="/work/_shared/assets/logo-candidate-2.png">    </p:cNvPr>
           <p:cNvPicPr>
             <a:picLocks noChangeAspect="1"/>
           </p:cNvPicPr>
@@ -36522,7 +36522,7 @@
       </p:sp>
       <p:pic>
         <p:nvPicPr>
-          <p:cNvPr id="3" name="Image 0" descr="/tmp/pcwork/api-patterns-and-practices-graphql/presentation/_shared/assets/logo-candidate-2.png">    </p:cNvPr>
+          <p:cNvPr id="3" name="Image 0" descr="/work/_shared/assets/logo-candidate-2.png">    </p:cNvPr>
           <p:cNvPicPr>
             <a:picLocks noChangeAspect="1"/>
           </p:cNvPicPr>
@@ -36624,7 +36624,7 @@
       </p:sp>
       <p:pic>
         <p:nvPicPr>
-          <p:cNvPr id="6" name="Image 1" descr="/tmp/pcwork/api-patterns-and-practices-graphql/presentation/_shared/png/A-in-cluster-build.png">    </p:cNvPr>
+          <p:cNvPr id="6" name="Image 1" descr="/work/_shared/png/A-in-cluster-build.png">    </p:cNvPr>
           <p:cNvPicPr>
             <a:picLocks noChangeAspect="1"/>
           </p:cNvPicPr>
@@ -36678,7 +36678,7 @@
                 <a:ea typeface="Red Hat Text" pitchFamily="34" charset="-122"/>
                 <a:cs typeface="Red Hat Text" pitchFamily="34" charset="-120"/>
               </a:rPr>
-              <a:t>Figure A.2 — One image, built where it runs.</a:t>
+              <a:t>Figure A.2: One image, built where it runs.</a:t>
             </a:r>
             <a:endParaRPr lang="en-US" sz="1300" dirty="0"/>
           </a:p>
@@ -36750,7 +36750,7 @@
       </p:sp>
       <p:pic>
         <p:nvPicPr>
-          <p:cNvPr id="3" name="Image 0" descr="/tmp/pcwork/api-patterns-and-practices-graphql/presentation/_shared/assets/logo-candidate-2.png">    </p:cNvPr>
+          <p:cNvPr id="3" name="Image 0" descr="/work/_shared/assets/logo-candidate-2.png">    </p:cNvPr>
           <p:cNvPicPr>
             <a:picLocks noChangeAspect="1"/>
           </p:cNvPicPr>
@@ -36852,7 +36852,7 @@
       </p:sp>
       <p:pic>
         <p:nvPicPr>
-          <p:cNvPr id="6" name="Image 1" descr="/tmp/pcwork/api-patterns-and-practices-graphql/presentation/_shared/assets/qr-graphql-site.png">    </p:cNvPr>
+          <p:cNvPr id="6" name="Image 1" descr="/work/_shared/assets/qr-graphql-site.png">    </p:cNvPr>
           <p:cNvPicPr>
             <a:picLocks noChangeAspect="1"/>
           </p:cNvPicPr>
@@ -36993,7 +36993,7 @@
       </p:sp>
       <p:pic>
         <p:nvPicPr>
-          <p:cNvPr id="10" name="Image 2" descr="/tmp/pcwork/api-patterns-and-practices-graphql/presentation/_shared/assets/qr-hub.png">    </p:cNvPr>
+          <p:cNvPr id="10" name="Image 2" descr="/work/_shared/assets/qr-hub.png">    </p:cNvPr>
           <p:cNvPicPr>
             <a:picLocks noChangeAspect="1"/>
           </p:cNvPicPr>
@@ -37198,7 +37198,7 @@
       </p:sp>
       <p:pic>
         <p:nvPicPr>
-          <p:cNvPr id="3" name="Image 0" descr="/tmp/pcwork/api-patterns-and-practices-graphql/presentation/_shared/assets/logo-candidate-2.png">    </p:cNvPr>
+          <p:cNvPr id="3" name="Image 0" descr="/work/_shared/assets/logo-candidate-2.png">    </p:cNvPr>
           <p:cNvPicPr>
             <a:picLocks noChangeAspect="1"/>
           </p:cNvPicPr>
@@ -37894,7 +37894,7 @@
       </p:sp>
       <p:pic>
         <p:nvPicPr>
-          <p:cNvPr id="5" name="Image 0" descr="/tmp/pcwork/api-patterns-and-practices-graphql/presentation/_shared/assets/redhat-logo-white.png">    </p:cNvPr>
+          <p:cNvPr id="5" name="Image 0" descr="/work/_shared/assets/redhat-logo-white.png">    </p:cNvPr>
           <p:cNvPicPr>
             <a:picLocks noChangeAspect="1"/>
           </p:cNvPicPr>
